--- a/rubrikETS.pptx
+++ b/rubrikETS.pptx
@@ -5,7 +5,7 @@
     <p:sldMasterId id="2147483648" r:id="rId1"/>
   </p:sldMasterIdLst>
   <p:notesMasterIdLst>
-    <p:notesMasterId r:id="rId9"/>
+    <p:notesMasterId r:id="rId12"/>
   </p:notesMasterIdLst>
   <p:sldIdLst>
     <p:sldId id="256" r:id="rId4"/>
@@ -13,6 +13,9 @@
     <p:sldId id="258" r:id="rId6"/>
     <p:sldId id="259" r:id="rId7"/>
     <p:sldId id="260" r:id="rId8"/>
+    <p:sldId id="261" r:id="rId9"/>
+    <p:sldId id="262" r:id="rId10"/>
+    <p:sldId id="263" r:id="rId11"/>
   </p:sldIdLst>
   <p:sldSz cx="12192000" cy="6858000"/>
   <p:notesSz cx="6858000" cy="9144000"/>
@@ -138,7 +141,7 @@
       </p:grpSpPr>
       <p:sp>
         <p:nvSpPr>
-          <p:cNvPr id="1876066714" name="Header Placeholder 1"/>
+          <p:cNvPr id="94901275" name="Header Placeholder 1"/>
           <p:cNvSpPr>
             <a:spLocks noGrp="1"/>
           </p:cNvSpPr>
@@ -172,7 +175,7 @@
       </p:sp>
       <p:sp>
         <p:nvSpPr>
-          <p:cNvPr id="971534535" name="Date Placeholder 2"/>
+          <p:cNvPr id="1249202975" name="Date Placeholder 2"/>
           <p:cNvSpPr>
             <a:spLocks noGrp="1"/>
           </p:cNvSpPr>
@@ -210,7 +213,7 @@
       </p:sp>
       <p:sp>
         <p:nvSpPr>
-          <p:cNvPr id="272858042" name="Slide Image Placeholder 3"/>
+          <p:cNvPr id="711969050" name="Slide Image Placeholder 3"/>
           <p:cNvSpPr>
             <a:spLocks noChangeAspect="1" noGrp="1" noRot="1"/>
           </p:cNvSpPr>
@@ -246,7 +249,7 @@
       </p:sp>
       <p:sp>
         <p:nvSpPr>
-          <p:cNvPr id="852716843" name="Notes Placeholder 4"/>
+          <p:cNvPr id="1210642693" name="Notes Placeholder 4"/>
           <p:cNvSpPr>
             <a:spLocks noGrp="1"/>
           </p:cNvSpPr>
@@ -320,7 +323,7 @@
       </p:sp>
       <p:sp>
         <p:nvSpPr>
-          <p:cNvPr id="1959904408" name="Footer Placeholder 5"/>
+          <p:cNvPr id="11869857" name="Footer Placeholder 5"/>
           <p:cNvSpPr>
             <a:spLocks noGrp="1"/>
           </p:cNvSpPr>
@@ -354,7 +357,7 @@
       </p:sp>
       <p:sp>
         <p:nvSpPr>
-          <p:cNvPr id="398112763" name="Slide Number Placeholder 6"/>
+          <p:cNvPr id="180546306" name="Slide Number Placeholder 6"/>
           <p:cNvSpPr>
             <a:spLocks noGrp="1"/>
           </p:cNvSpPr>
@@ -507,7 +510,7 @@
       </p:grpSpPr>
       <p:sp>
         <p:nvSpPr>
-          <p:cNvPr id="787477125" name="Slide Image Placeholder 1"/>
+          <p:cNvPr id="1992624308" name="Slide Image Placeholder 1"/>
           <p:cNvSpPr>
             <a:spLocks noChangeAspect="1" noGrp="1" noRot="1"/>
           </p:cNvSpPr>
@@ -524,7 +527,7 @@
       </p:sp>
       <p:sp>
         <p:nvSpPr>
-          <p:cNvPr id="1862095377" name="Notes Placeholder 2"/>
+          <p:cNvPr id="265049942" name="Notes Placeholder 2"/>
           <p:cNvSpPr>
             <a:spLocks noGrp="1"/>
           </p:cNvSpPr>
@@ -549,7 +552,7 @@
       </p:sp>
       <p:sp>
         <p:nvSpPr>
-          <p:cNvPr id="535156256" name="Slide Number Placeholder 3"/>
+          <p:cNvPr id="82197310" name="Slide Number Placeholder 3"/>
           <p:cNvSpPr>
             <a:spLocks noGrp="1"/>
           </p:cNvSpPr>
@@ -600,7 +603,7 @@
       </p:grpSpPr>
       <p:sp>
         <p:nvSpPr>
-          <p:cNvPr id="366237854" name="Slide Image Placeholder 1"/>
+          <p:cNvPr id="1222881398" name="Slide Image Placeholder 1"/>
           <p:cNvSpPr>
             <a:spLocks noChangeAspect="1" noGrp="1" noRot="1"/>
           </p:cNvSpPr>
@@ -612,7 +615,7 @@
       </p:sp>
       <p:sp>
         <p:nvSpPr>
-          <p:cNvPr id="2067258389" name="Notes Placeholder 2"/>
+          <p:cNvPr id="29857699" name="Notes Placeholder 2"/>
           <p:cNvSpPr>
             <a:spLocks noGrp="1"/>
           </p:cNvSpPr>
@@ -634,7 +637,7 @@
       </p:sp>
       <p:sp>
         <p:nvSpPr>
-          <p:cNvPr id="892640925" name="Slide Number Placeholder 3"/>
+          <p:cNvPr id="1047651387" name="Slide Number Placeholder 3"/>
           <p:cNvSpPr>
             <a:spLocks noGrp="1"/>
           </p:cNvSpPr>
@@ -685,7 +688,7 @@
       </p:grpSpPr>
       <p:sp>
         <p:nvSpPr>
-          <p:cNvPr id="347978090" name="Slide Image Placeholder 1"/>
+          <p:cNvPr id="706624908" name="Slide Image Placeholder 1"/>
           <p:cNvSpPr>
             <a:spLocks noChangeAspect="1" noGrp="1" noRot="1"/>
           </p:cNvSpPr>
@@ -697,7 +700,7 @@
       </p:sp>
       <p:sp>
         <p:nvSpPr>
-          <p:cNvPr id="1528223066" name="Notes Placeholder 2"/>
+          <p:cNvPr id="1160298163" name="Notes Placeholder 2"/>
           <p:cNvSpPr>
             <a:spLocks noGrp="1"/>
           </p:cNvSpPr>
@@ -719,7 +722,7 @@
       </p:sp>
       <p:sp>
         <p:nvSpPr>
-          <p:cNvPr id="1995004742" name="Slide Number Placeholder 3"/>
+          <p:cNvPr id="2141883703" name="Slide Number Placeholder 3"/>
           <p:cNvSpPr>
             <a:spLocks noGrp="1"/>
           </p:cNvSpPr>
@@ -735,7 +738,7 @@
             <a:pPr>
               <a:defRPr/>
             </a:pPr>
-            <a:fld id="{C5F89B9B-3E0D-7BF7-6B4B-0FD83251F2CC}" type="slidenum">
+            <a:fld id="{254C36D1-48B9-77A7-059C-FAB9F3BEA3C5}" type="slidenum">
               <a:rPr/>
               <a:t/>
             </a:fld>
@@ -770,7 +773,7 @@
       </p:grpSpPr>
       <p:sp>
         <p:nvSpPr>
-          <p:cNvPr id="1977398310" name="Slide Image Placeholder 1"/>
+          <p:cNvPr id="121435091" name="Slide Image Placeholder 1"/>
           <p:cNvSpPr>
             <a:spLocks noChangeAspect="1" noGrp="1" noRot="1"/>
           </p:cNvSpPr>
@@ -782,7 +785,7 @@
       </p:sp>
       <p:sp>
         <p:nvSpPr>
-          <p:cNvPr id="589440906" name="Notes Placeholder 2"/>
+          <p:cNvPr id="145884490" name="Notes Placeholder 2"/>
           <p:cNvSpPr>
             <a:spLocks noGrp="1"/>
           </p:cNvSpPr>
@@ -804,7 +807,7 @@
       </p:sp>
       <p:sp>
         <p:nvSpPr>
-          <p:cNvPr id="701027545" name="Slide Number Placeholder 3"/>
+          <p:cNvPr id="1881100436" name="Slide Number Placeholder 3"/>
           <p:cNvSpPr>
             <a:spLocks noGrp="1"/>
           </p:cNvSpPr>
@@ -820,7 +823,7 @@
             <a:pPr>
               <a:defRPr/>
             </a:pPr>
-            <a:fld id="{754D2F84-1D72-6408-D553-9DDABAB266A0}" type="slidenum">
+            <a:fld id="{B0272878-E37A-D606-AD5A-A96CE3DB26E1}" type="slidenum">
               <a:rPr/>
               <a:t/>
             </a:fld>
@@ -855,7 +858,7 @@
       </p:grpSpPr>
       <p:sp>
         <p:nvSpPr>
-          <p:cNvPr id="1462916817" name="Slide Image Placeholder 1"/>
+          <p:cNvPr id="1432097629" name="Slide Image Placeholder 1"/>
           <p:cNvSpPr>
             <a:spLocks noChangeAspect="1" noGrp="1" noRot="1"/>
           </p:cNvSpPr>
@@ -867,7 +870,7 @@
       </p:sp>
       <p:sp>
         <p:nvSpPr>
-          <p:cNvPr id="556949959" name="Notes Placeholder 2"/>
+          <p:cNvPr id="379373038" name="Notes Placeholder 2"/>
           <p:cNvSpPr>
             <a:spLocks noGrp="1"/>
           </p:cNvSpPr>
@@ -889,7 +892,7 @@
       </p:sp>
       <p:sp>
         <p:nvSpPr>
-          <p:cNvPr id="345578873" name="Slide Number Placeholder 3"/>
+          <p:cNvPr id="1391296464" name="Slide Number Placeholder 3"/>
           <p:cNvSpPr>
             <a:spLocks noGrp="1"/>
           </p:cNvSpPr>
@@ -905,7 +908,262 @@
             <a:pPr>
               <a:defRPr/>
             </a:pPr>
-            <a:fld id="{286ED787-B00F-19D8-50E7-C0009AAE567C}" type="slidenum">
+            <a:fld id="{97E1A712-1AD3-9DF6-9596-C5FEC53BB69A}" type="slidenum">
+              <a:rPr/>
+              <a:t/>
+            </a:fld>
+            <a:endParaRPr/>
+          </a:p>
+        </p:txBody>
+      </p:sp>
+    </p:spTree>
+  </p:cSld>
+  <p:clrMapOvr>
+    <a:masterClrMapping/>
+  </p:clrMapOvr>
+</p:notes>
+</file>
+
+<file path=ppt/notesSlides/notesSlide6.xml><?xml version="1.0" encoding="utf-8"?>
+<p:notes xmlns:a="http://schemas.openxmlformats.org/drawingml/2006/main" xmlns:r="http://schemas.openxmlformats.org/officeDocument/2006/relationships" xmlns:p="http://schemas.openxmlformats.org/presentationml/2006/main" xmlns:m="http://schemas.openxmlformats.org/officeDocument/2006/math" xmlns:w="http://schemas.openxmlformats.org/wordprocessingml/2006/main">
+  <p:cSld name="">
+    <p:spTree>
+      <p:nvGrpSpPr>
+        <p:cNvPr id="1" name=""/>
+        <p:cNvGrpSpPr/>
+        <p:nvPr/>
+      </p:nvGrpSpPr>
+      <p:grpSpPr bwMode="auto">
+        <a:xfrm>
+          <a:off x="0" y="0"/>
+          <a:ext cx="0" cy="0"/>
+          <a:chOff x="0" y="0"/>
+          <a:chExt cx="0" cy="0"/>
+        </a:xfrm>
+      </p:grpSpPr>
+      <p:sp>
+        <p:nvSpPr>
+          <p:cNvPr id="1244645747" name="Slide Image Placeholder 1"/>
+          <p:cNvSpPr>
+            <a:spLocks noChangeAspect="1" noGrp="1" noRot="1"/>
+          </p:cNvSpPr>
+          <p:nvPr>
+            <p:ph type="sldImg"/>
+          </p:nvPr>
+        </p:nvSpPr>
+        <p:spPr bwMode="auto"/>
+      </p:sp>
+      <p:sp>
+        <p:nvSpPr>
+          <p:cNvPr id="1545397774" name="Notes Placeholder 2"/>
+          <p:cNvSpPr>
+            <a:spLocks noGrp="1"/>
+          </p:cNvSpPr>
+          <p:nvPr>
+            <p:ph type="body" idx="1"/>
+          </p:nvPr>
+        </p:nvSpPr>
+        <p:spPr bwMode="auto"/>
+        <p:txBody>
+          <a:bodyPr/>
+          <a:lstStyle/>
+          <a:p>
+            <a:pPr>
+              <a:defRPr/>
+            </a:pPr>
+            <a:endParaRPr/>
+          </a:p>
+        </p:txBody>
+      </p:sp>
+      <p:sp>
+        <p:nvSpPr>
+          <p:cNvPr id="1461658771" name="Slide Number Placeholder 3"/>
+          <p:cNvSpPr>
+            <a:spLocks noGrp="1"/>
+          </p:cNvSpPr>
+          <p:nvPr>
+            <p:ph type="sldNum" sz="quarter" idx="10"/>
+          </p:nvPr>
+        </p:nvSpPr>
+        <p:spPr bwMode="auto"/>
+        <p:txBody>
+          <a:bodyPr/>
+          <a:lstStyle/>
+          <a:p>
+            <a:pPr>
+              <a:defRPr/>
+            </a:pPr>
+            <a:fld id="{E8E06924-543E-8C18-F9C4-B0301177035B}" type="slidenum">
+              <a:rPr/>
+              <a:t/>
+            </a:fld>
+            <a:endParaRPr/>
+          </a:p>
+        </p:txBody>
+      </p:sp>
+    </p:spTree>
+  </p:cSld>
+  <p:clrMapOvr>
+    <a:masterClrMapping/>
+  </p:clrMapOvr>
+</p:notes>
+</file>
+
+<file path=ppt/notesSlides/notesSlide7.xml><?xml version="1.0" encoding="utf-8"?>
+<p:notes xmlns:a="http://schemas.openxmlformats.org/drawingml/2006/main" xmlns:r="http://schemas.openxmlformats.org/officeDocument/2006/relationships" xmlns:p="http://schemas.openxmlformats.org/presentationml/2006/main" xmlns:m="http://schemas.openxmlformats.org/officeDocument/2006/math" xmlns:w="http://schemas.openxmlformats.org/wordprocessingml/2006/main">
+  <p:cSld name="">
+    <p:spTree>
+      <p:nvGrpSpPr>
+        <p:cNvPr id="1" name=""/>
+        <p:cNvGrpSpPr/>
+        <p:nvPr/>
+      </p:nvGrpSpPr>
+      <p:grpSpPr bwMode="auto">
+        <a:xfrm>
+          <a:off x="0" y="0"/>
+          <a:ext cx="0" cy="0"/>
+          <a:chOff x="0" y="0"/>
+          <a:chExt cx="0" cy="0"/>
+        </a:xfrm>
+      </p:grpSpPr>
+      <p:sp>
+        <p:nvSpPr>
+          <p:cNvPr id="1394545204" name="Slide Image Placeholder 1"/>
+          <p:cNvSpPr>
+            <a:spLocks noChangeAspect="1" noGrp="1" noRot="1"/>
+          </p:cNvSpPr>
+          <p:nvPr>
+            <p:ph type="sldImg"/>
+          </p:nvPr>
+        </p:nvSpPr>
+        <p:spPr bwMode="auto"/>
+      </p:sp>
+      <p:sp>
+        <p:nvSpPr>
+          <p:cNvPr id="802865947" name="Notes Placeholder 2"/>
+          <p:cNvSpPr>
+            <a:spLocks noGrp="1"/>
+          </p:cNvSpPr>
+          <p:nvPr>
+            <p:ph type="body" idx="1"/>
+          </p:nvPr>
+        </p:nvSpPr>
+        <p:spPr bwMode="auto"/>
+        <p:txBody>
+          <a:bodyPr/>
+          <a:lstStyle/>
+          <a:p>
+            <a:pPr>
+              <a:defRPr/>
+            </a:pPr>
+            <a:endParaRPr/>
+          </a:p>
+        </p:txBody>
+      </p:sp>
+      <p:sp>
+        <p:nvSpPr>
+          <p:cNvPr id="1318428950" name="Slide Number Placeholder 3"/>
+          <p:cNvSpPr>
+            <a:spLocks noGrp="1"/>
+          </p:cNvSpPr>
+          <p:nvPr>
+            <p:ph type="sldNum" sz="quarter" idx="10"/>
+          </p:nvPr>
+        </p:nvSpPr>
+        <p:spPr bwMode="auto"/>
+        <p:txBody>
+          <a:bodyPr/>
+          <a:lstStyle/>
+          <a:p>
+            <a:pPr>
+              <a:defRPr/>
+            </a:pPr>
+            <a:fld id="{AA7A4857-064C-C475-3664-DCE6F538448E}" type="slidenum">
+              <a:rPr/>
+              <a:t/>
+            </a:fld>
+            <a:endParaRPr/>
+          </a:p>
+        </p:txBody>
+      </p:sp>
+    </p:spTree>
+  </p:cSld>
+  <p:clrMapOvr>
+    <a:masterClrMapping/>
+  </p:clrMapOvr>
+</p:notes>
+</file>
+
+<file path=ppt/notesSlides/notesSlide8.xml><?xml version="1.0" encoding="utf-8"?>
+<p:notes xmlns:a="http://schemas.openxmlformats.org/drawingml/2006/main" xmlns:r="http://schemas.openxmlformats.org/officeDocument/2006/relationships" xmlns:p="http://schemas.openxmlformats.org/presentationml/2006/main" xmlns:m="http://schemas.openxmlformats.org/officeDocument/2006/math" xmlns:w="http://schemas.openxmlformats.org/wordprocessingml/2006/main">
+  <p:cSld name="">
+    <p:spTree>
+      <p:nvGrpSpPr>
+        <p:cNvPr id="1" name=""/>
+        <p:cNvGrpSpPr/>
+        <p:nvPr/>
+      </p:nvGrpSpPr>
+      <p:grpSpPr bwMode="auto">
+        <a:xfrm>
+          <a:off x="0" y="0"/>
+          <a:ext cx="0" cy="0"/>
+          <a:chOff x="0" y="0"/>
+          <a:chExt cx="0" cy="0"/>
+        </a:xfrm>
+      </p:grpSpPr>
+      <p:sp>
+        <p:nvSpPr>
+          <p:cNvPr id="270945092" name="Slide Image Placeholder 1"/>
+          <p:cNvSpPr>
+            <a:spLocks noChangeAspect="1" noGrp="1" noRot="1"/>
+          </p:cNvSpPr>
+          <p:nvPr>
+            <p:ph type="sldImg"/>
+          </p:nvPr>
+        </p:nvSpPr>
+        <p:spPr bwMode="auto"/>
+      </p:sp>
+      <p:sp>
+        <p:nvSpPr>
+          <p:cNvPr id="505956634" name="Notes Placeholder 2"/>
+          <p:cNvSpPr>
+            <a:spLocks noGrp="1"/>
+          </p:cNvSpPr>
+          <p:nvPr>
+            <p:ph type="body" idx="1"/>
+          </p:nvPr>
+        </p:nvSpPr>
+        <p:spPr bwMode="auto"/>
+        <p:txBody>
+          <a:bodyPr/>
+          <a:lstStyle/>
+          <a:p>
+            <a:pPr>
+              <a:defRPr/>
+            </a:pPr>
+            <a:endParaRPr/>
+          </a:p>
+        </p:txBody>
+      </p:sp>
+      <p:sp>
+        <p:nvSpPr>
+          <p:cNvPr id="1352118178" name="Slide Number Placeholder 3"/>
+          <p:cNvSpPr>
+            <a:spLocks noGrp="1"/>
+          </p:cNvSpPr>
+          <p:nvPr>
+            <p:ph type="sldNum" sz="quarter" idx="10"/>
+          </p:nvPr>
+        </p:nvSpPr>
+        <p:spPr bwMode="auto"/>
+        <p:txBody>
+          <a:bodyPr/>
+          <a:lstStyle/>
+          <a:p>
+            <a:pPr>
+              <a:defRPr/>
+            </a:pPr>
+            <a:fld id="{1FBFC65A-55E1-52FA-900B-5E3E111B8F2A}" type="slidenum">
               <a:rPr/>
               <a:t/>
             </a:fld>
@@ -940,7 +1198,7 @@
       </p:grpSpPr>
       <p:sp>
         <p:nvSpPr>
-          <p:cNvPr id="2075215343" name="Shape 1059"/>
+          <p:cNvPr id="84610531" name="Shape 1059"/>
           <p:cNvSpPr>
             <a:spLocks noChangeArrowheads="1" noGrp="1"/>
           </p:cNvSpPr>
@@ -1063,7 +1321,7 @@
       </p:sp>
       <p:sp>
         <p:nvSpPr>
-          <p:cNvPr id="1834861784" name="Shape 1060"/>
+          <p:cNvPr id="901723592" name="Shape 1060"/>
           <p:cNvSpPr>
             <a:spLocks noChangeArrowheads="1" noGrp="1"/>
           </p:cNvSpPr>
@@ -1154,7 +1412,7 @@
       </p:sp>
       <p:sp>
         <p:nvSpPr>
-          <p:cNvPr id="737603887" name="Shape 1061"/>
+          <p:cNvPr id="2016962568" name="Shape 1061"/>
           <p:cNvSpPr>
             <a:spLocks noChangeArrowheads="1" noGrp="1"/>
           </p:cNvSpPr>
@@ -1240,7 +1498,7 @@
       </p:sp>
       <p:sp>
         <p:nvSpPr>
-          <p:cNvPr id="885927917" name="Shape 1062"/>
+          <p:cNvPr id="234492519" name="Shape 1062"/>
           <p:cNvSpPr>
             <a:spLocks noChangeArrowheads="1" noGrp="1"/>
           </p:cNvSpPr>
@@ -1318,7 +1576,7 @@
       </p:sp>
       <p:sp>
         <p:nvSpPr>
-          <p:cNvPr id="845752841" name="Shape 1063"/>
+          <p:cNvPr id="1402196417" name="Shape 1063"/>
           <p:cNvSpPr>
             <a:spLocks noChangeArrowheads="1" noGrp="1"/>
           </p:cNvSpPr>
@@ -1396,7 +1654,7 @@
       </p:sp>
       <p:sp>
         <p:nvSpPr>
-          <p:cNvPr id="1946280982" name="Subtitle 2"/>
+          <p:cNvPr id="314818968" name="Subtitle 2"/>
           <p:cNvSpPr>
             <a:spLocks noGrp="1"/>
           </p:cNvSpPr>
@@ -1519,7 +1777,7 @@
       </p:sp>
       <p:sp>
         <p:nvSpPr>
-          <p:cNvPr id="1895659335" name="Date Placeholder 3"/>
+          <p:cNvPr id="161225824" name="Date Placeholder 3"/>
           <p:cNvSpPr>
             <a:spLocks noGrp="1"/>
           </p:cNvSpPr>
@@ -1545,7 +1803,7 @@
       </p:sp>
       <p:sp>
         <p:nvSpPr>
-          <p:cNvPr id="2052424711" name="Footer Placeholder 4"/>
+          <p:cNvPr id="854724660" name="Footer Placeholder 4"/>
           <p:cNvSpPr>
             <a:spLocks noGrp="1"/>
           </p:cNvSpPr>
@@ -1567,7 +1825,7 @@
       </p:sp>
       <p:sp>
         <p:nvSpPr>
-          <p:cNvPr id="572911087" name="Slide Number Placeholder 5"/>
+          <p:cNvPr id="1027550752" name="Slide Number Placeholder 5"/>
           <p:cNvSpPr>
             <a:spLocks noGrp="1"/>
           </p:cNvSpPr>
@@ -1593,7 +1851,7 @@
       </p:sp>
       <p:sp>
         <p:nvSpPr>
-          <p:cNvPr id="474591386" name="Title 6"/>
+          <p:cNvPr id="138303879" name="Title 6"/>
           <p:cNvSpPr>
             <a:spLocks noGrp="1"/>
           </p:cNvSpPr>
@@ -1653,7 +1911,7 @@
       </p:grpSpPr>
       <p:sp>
         <p:nvSpPr>
-          <p:cNvPr id="248716627" name="Title 1"/>
+          <p:cNvPr id="1173112230" name="Title 1"/>
           <p:cNvSpPr>
             <a:spLocks noGrp="1"/>
           </p:cNvSpPr>
@@ -1679,7 +1937,7 @@
       </p:sp>
       <p:sp>
         <p:nvSpPr>
-          <p:cNvPr id="1045992363" name="Vertical Text Placeholder 2"/>
+          <p:cNvPr id="1934272057" name="Vertical Text Placeholder 2"/>
           <p:cNvSpPr>
             <a:spLocks noGrp="1"/>
           </p:cNvSpPr>
@@ -1745,7 +2003,7 @@
       </p:sp>
       <p:sp>
         <p:nvSpPr>
-          <p:cNvPr id="1452147809" name="Date Placeholder 3"/>
+          <p:cNvPr id="1978549232" name="Date Placeholder 3"/>
           <p:cNvSpPr>
             <a:spLocks noGrp="1"/>
           </p:cNvSpPr>
@@ -1771,7 +2029,7 @@
       </p:sp>
       <p:sp>
         <p:nvSpPr>
-          <p:cNvPr id="69256791" name="Footer Placeholder 4"/>
+          <p:cNvPr id="158781516" name="Footer Placeholder 4"/>
           <p:cNvSpPr>
             <a:spLocks noGrp="1"/>
           </p:cNvSpPr>
@@ -1793,7 +2051,7 @@
       </p:sp>
       <p:sp>
         <p:nvSpPr>
-          <p:cNvPr id="1387830684" name="Slide Number Placeholder 5"/>
+          <p:cNvPr id="894720439" name="Slide Number Placeholder 5"/>
           <p:cNvSpPr>
             <a:spLocks noGrp="1"/>
           </p:cNvSpPr>
@@ -1844,7 +2102,7 @@
       </p:grpSpPr>
       <p:sp>
         <p:nvSpPr>
-          <p:cNvPr id="418871229" name="Vertical Title 1"/>
+          <p:cNvPr id="1372393624" name="Vertical Title 1"/>
           <p:cNvSpPr>
             <a:spLocks noGrp="1"/>
           </p:cNvSpPr>
@@ -1879,7 +2137,7 @@
       </p:sp>
       <p:sp>
         <p:nvSpPr>
-          <p:cNvPr id="1662780393" name="Vertical Text Placeholder 2"/>
+          <p:cNvPr id="1150805579" name="Vertical Text Placeholder 2"/>
           <p:cNvSpPr>
             <a:spLocks noGrp="1"/>
           </p:cNvSpPr>
@@ -1950,7 +2208,7 @@
       </p:sp>
       <p:sp>
         <p:nvSpPr>
-          <p:cNvPr id="2022940020" name="Date Placeholder 3"/>
+          <p:cNvPr id="244530018" name="Date Placeholder 3"/>
           <p:cNvSpPr>
             <a:spLocks noGrp="1"/>
           </p:cNvSpPr>
@@ -1976,7 +2234,7 @@
       </p:sp>
       <p:sp>
         <p:nvSpPr>
-          <p:cNvPr id="1725692947" name="Footer Placeholder 4"/>
+          <p:cNvPr id="844334437" name="Footer Placeholder 4"/>
           <p:cNvSpPr>
             <a:spLocks noGrp="1"/>
           </p:cNvSpPr>
@@ -1998,7 +2256,7 @@
       </p:sp>
       <p:sp>
         <p:nvSpPr>
-          <p:cNvPr id="1052035715" name="Slide Number Placeholder 5"/>
+          <p:cNvPr id="566969059" name="Slide Number Placeholder 5"/>
           <p:cNvSpPr>
             <a:spLocks noGrp="1"/>
           </p:cNvSpPr>
@@ -2049,7 +2307,7 @@
       </p:grpSpPr>
       <p:sp>
         <p:nvSpPr>
-          <p:cNvPr id="747209842" name="Title 1"/>
+          <p:cNvPr id="2141949683" name="Title 1"/>
           <p:cNvSpPr>
             <a:spLocks noGrp="1"/>
           </p:cNvSpPr>
@@ -2075,7 +2333,7 @@
       </p:sp>
       <p:sp>
         <p:nvSpPr>
-          <p:cNvPr id="1617808305" name="Content Placeholder 2"/>
+          <p:cNvPr id="56889696" name="Content Placeholder 2"/>
           <p:cNvSpPr>
             <a:spLocks noGrp="1"/>
           </p:cNvSpPr>
@@ -2141,7 +2399,7 @@
       </p:sp>
       <p:sp>
         <p:nvSpPr>
-          <p:cNvPr id="636351834" name="Date Placeholder 3"/>
+          <p:cNvPr id="649544214" name="Date Placeholder 3"/>
           <p:cNvSpPr>
             <a:spLocks noGrp="1"/>
           </p:cNvSpPr>
@@ -2167,7 +2425,7 @@
       </p:sp>
       <p:sp>
         <p:nvSpPr>
-          <p:cNvPr id="205634006" name="Footer Placeholder 4"/>
+          <p:cNvPr id="141471638" name="Footer Placeholder 4"/>
           <p:cNvSpPr>
             <a:spLocks noGrp="1"/>
           </p:cNvSpPr>
@@ -2189,7 +2447,7 @@
       </p:sp>
       <p:sp>
         <p:nvSpPr>
-          <p:cNvPr id="1776474083" name="Slide Number Placeholder 5"/>
+          <p:cNvPr id="920856246" name="Slide Number Placeholder 5"/>
           <p:cNvSpPr>
             <a:spLocks noGrp="1"/>
           </p:cNvSpPr>
@@ -2240,7 +2498,7 @@
       </p:grpSpPr>
       <p:sp>
         <p:nvSpPr>
-          <p:cNvPr id="1810401414" name="Title 1"/>
+          <p:cNvPr id="1111082098" name="Title 1"/>
           <p:cNvSpPr>
             <a:spLocks noGrp="1"/>
           </p:cNvSpPr>
@@ -2275,7 +2533,7 @@
       </p:sp>
       <p:sp>
         <p:nvSpPr>
-          <p:cNvPr id="827719729" name="Text Placeholder 2"/>
+          <p:cNvPr id="1025625018" name="Text Placeholder 2"/>
           <p:cNvSpPr>
             <a:spLocks noGrp="1"/>
           </p:cNvSpPr>
@@ -2397,7 +2655,7 @@
       </p:sp>
       <p:sp>
         <p:nvSpPr>
-          <p:cNvPr id="1475200561" name="Date Placeholder 3"/>
+          <p:cNvPr id="456380698" name="Date Placeholder 3"/>
           <p:cNvSpPr>
             <a:spLocks noGrp="1"/>
           </p:cNvSpPr>
@@ -2423,7 +2681,7 @@
       </p:sp>
       <p:sp>
         <p:nvSpPr>
-          <p:cNvPr id="514356259" name="Footer Placeholder 4"/>
+          <p:cNvPr id="996384650" name="Footer Placeholder 4"/>
           <p:cNvSpPr>
             <a:spLocks noGrp="1"/>
           </p:cNvSpPr>
@@ -2445,7 +2703,7 @@
       </p:sp>
       <p:sp>
         <p:nvSpPr>
-          <p:cNvPr id="1119194096" name="Slide Number Placeholder 5"/>
+          <p:cNvPr id="983677052" name="Slide Number Placeholder 5"/>
           <p:cNvSpPr>
             <a:spLocks noGrp="1"/>
           </p:cNvSpPr>
@@ -2496,7 +2754,7 @@
       </p:grpSpPr>
       <p:sp>
         <p:nvSpPr>
-          <p:cNvPr id="1508910817" name="Title 1"/>
+          <p:cNvPr id="1230250356" name="Title 1"/>
           <p:cNvSpPr>
             <a:spLocks noGrp="1"/>
           </p:cNvSpPr>
@@ -2522,7 +2780,7 @@
       </p:sp>
       <p:sp>
         <p:nvSpPr>
-          <p:cNvPr id="1076102752" name="Content Placeholder 2"/>
+          <p:cNvPr id="1291777511" name="Content Placeholder 2"/>
           <p:cNvSpPr>
             <a:spLocks noGrp="1"/>
           </p:cNvSpPr>
@@ -2621,7 +2879,7 @@
       </p:sp>
       <p:sp>
         <p:nvSpPr>
-          <p:cNvPr id="293679600" name="Content Placeholder 3"/>
+          <p:cNvPr id="43770311" name="Content Placeholder 3"/>
           <p:cNvSpPr>
             <a:spLocks noGrp="1"/>
           </p:cNvSpPr>
@@ -2720,7 +2978,7 @@
       </p:sp>
       <p:sp>
         <p:nvSpPr>
-          <p:cNvPr id="51770616" name="Date Placeholder 4"/>
+          <p:cNvPr id="1080866776" name="Date Placeholder 4"/>
           <p:cNvSpPr>
             <a:spLocks noGrp="1"/>
           </p:cNvSpPr>
@@ -2746,7 +3004,7 @@
       </p:sp>
       <p:sp>
         <p:nvSpPr>
-          <p:cNvPr id="678278782" name="Footer Placeholder 5"/>
+          <p:cNvPr id="1591843955" name="Footer Placeholder 5"/>
           <p:cNvSpPr>
             <a:spLocks noGrp="1"/>
           </p:cNvSpPr>
@@ -2768,7 +3026,7 @@
       </p:sp>
       <p:sp>
         <p:nvSpPr>
-          <p:cNvPr id="609846435" name="Slide Number Placeholder 6"/>
+          <p:cNvPr id="1490486843" name="Slide Number Placeholder 6"/>
           <p:cNvSpPr>
             <a:spLocks noGrp="1"/>
           </p:cNvSpPr>
@@ -2819,7 +3077,7 @@
       </p:grpSpPr>
       <p:sp>
         <p:nvSpPr>
-          <p:cNvPr id="2013985877" name="Title 1"/>
+          <p:cNvPr id="1036452567" name="Title 1"/>
           <p:cNvSpPr>
             <a:spLocks noGrp="1"/>
           </p:cNvSpPr>
@@ -2849,7 +3107,7 @@
       </p:sp>
       <p:sp>
         <p:nvSpPr>
-          <p:cNvPr id="467755361" name="Text Placeholder 2"/>
+          <p:cNvPr id="1850028687" name="Text Placeholder 2"/>
           <p:cNvSpPr>
             <a:spLocks noGrp="1"/>
           </p:cNvSpPr>
@@ -2917,7 +3175,7 @@
       </p:sp>
       <p:sp>
         <p:nvSpPr>
-          <p:cNvPr id="1756672828" name="Content Placeholder 3"/>
+          <p:cNvPr id="2115649920" name="Content Placeholder 3"/>
           <p:cNvSpPr>
             <a:spLocks noGrp="1"/>
           </p:cNvSpPr>
@@ -3016,7 +3274,7 @@
       </p:sp>
       <p:sp>
         <p:nvSpPr>
-          <p:cNvPr id="1891789679" name="Text Placeholder 4"/>
+          <p:cNvPr id="113628129" name="Text Placeholder 4"/>
           <p:cNvSpPr>
             <a:spLocks noGrp="1"/>
           </p:cNvSpPr>
@@ -3084,7 +3342,7 @@
       </p:sp>
       <p:sp>
         <p:nvSpPr>
-          <p:cNvPr id="215698121" name="Content Placeholder 5"/>
+          <p:cNvPr id="1634501940" name="Content Placeholder 5"/>
           <p:cNvSpPr>
             <a:spLocks noGrp="1"/>
           </p:cNvSpPr>
@@ -3183,7 +3441,7 @@
       </p:sp>
       <p:sp>
         <p:nvSpPr>
-          <p:cNvPr id="1610386528" name="Date Placeholder 6"/>
+          <p:cNvPr id="789965808" name="Date Placeholder 6"/>
           <p:cNvSpPr>
             <a:spLocks noGrp="1"/>
           </p:cNvSpPr>
@@ -3209,7 +3467,7 @@
       </p:sp>
       <p:sp>
         <p:nvSpPr>
-          <p:cNvPr id="1304913920" name="Footer Placeholder 7"/>
+          <p:cNvPr id="1539832180" name="Footer Placeholder 7"/>
           <p:cNvSpPr>
             <a:spLocks noGrp="1"/>
           </p:cNvSpPr>
@@ -3231,7 +3489,7 @@
       </p:sp>
       <p:sp>
         <p:nvSpPr>
-          <p:cNvPr id="1509643392" name="Slide Number Placeholder 8"/>
+          <p:cNvPr id="1553343926" name="Slide Number Placeholder 8"/>
           <p:cNvSpPr>
             <a:spLocks noGrp="1"/>
           </p:cNvSpPr>
@@ -3282,7 +3540,7 @@
       </p:grpSpPr>
       <p:sp>
         <p:nvSpPr>
-          <p:cNvPr id="904353655" name="Title 1"/>
+          <p:cNvPr id="719867485" name="Title 1"/>
           <p:cNvSpPr>
             <a:spLocks noGrp="1"/>
           </p:cNvSpPr>
@@ -3308,7 +3566,7 @@
       </p:sp>
       <p:sp>
         <p:nvSpPr>
-          <p:cNvPr id="1513317035" name="Date Placeholder 2"/>
+          <p:cNvPr id="282351563" name="Date Placeholder 2"/>
           <p:cNvSpPr>
             <a:spLocks noGrp="1"/>
           </p:cNvSpPr>
@@ -3334,7 +3592,7 @@
       </p:sp>
       <p:sp>
         <p:nvSpPr>
-          <p:cNvPr id="305671171" name="Footer Placeholder 3"/>
+          <p:cNvPr id="1784747675" name="Footer Placeholder 3"/>
           <p:cNvSpPr>
             <a:spLocks noGrp="1"/>
           </p:cNvSpPr>
@@ -3356,7 +3614,7 @@
       </p:sp>
       <p:sp>
         <p:nvSpPr>
-          <p:cNvPr id="1135634422" name="Slide Number Placeholder 4"/>
+          <p:cNvPr id="1438007579" name="Slide Number Placeholder 4"/>
           <p:cNvSpPr>
             <a:spLocks noGrp="1"/>
           </p:cNvSpPr>
@@ -3407,7 +3665,7 @@
       </p:grpSpPr>
       <p:sp>
         <p:nvSpPr>
-          <p:cNvPr id="1382338626" name="Date Placeholder 1"/>
+          <p:cNvPr id="533467813" name="Date Placeholder 1"/>
           <p:cNvSpPr>
             <a:spLocks noGrp="1"/>
           </p:cNvSpPr>
@@ -3433,7 +3691,7 @@
       </p:sp>
       <p:sp>
         <p:nvSpPr>
-          <p:cNvPr id="1772493932" name="Footer Placeholder 2"/>
+          <p:cNvPr id="1126242830" name="Footer Placeholder 2"/>
           <p:cNvSpPr>
             <a:spLocks noGrp="1"/>
           </p:cNvSpPr>
@@ -3455,7 +3713,7 @@
       </p:sp>
       <p:sp>
         <p:nvSpPr>
-          <p:cNvPr id="875131870" name="Slide Number Placeholder 3"/>
+          <p:cNvPr id="1641912548" name="Slide Number Placeholder 3"/>
           <p:cNvSpPr>
             <a:spLocks noGrp="1"/>
           </p:cNvSpPr>
@@ -3506,7 +3764,7 @@
       </p:grpSpPr>
       <p:sp>
         <p:nvSpPr>
-          <p:cNvPr id="705860725" name="Title 1"/>
+          <p:cNvPr id="606184387" name="Title 1"/>
           <p:cNvSpPr>
             <a:spLocks noGrp="1"/>
           </p:cNvSpPr>
@@ -3541,7 +3799,7 @@
       </p:sp>
       <p:sp>
         <p:nvSpPr>
-          <p:cNvPr id="1557131785" name="Content Placeholder 2"/>
+          <p:cNvPr id="12939742" name="Content Placeholder 2"/>
           <p:cNvSpPr>
             <a:spLocks noGrp="1"/>
           </p:cNvSpPr>
@@ -3640,7 +3898,7 @@
       </p:sp>
       <p:sp>
         <p:nvSpPr>
-          <p:cNvPr id="363363475" name="Text Placeholder 3"/>
+          <p:cNvPr id="2062475266" name="Text Placeholder 3"/>
           <p:cNvSpPr>
             <a:spLocks noGrp="1"/>
           </p:cNvSpPr>
@@ -3708,7 +3966,7 @@
       </p:sp>
       <p:sp>
         <p:nvSpPr>
-          <p:cNvPr id="852760259" name="Date Placeholder 4"/>
+          <p:cNvPr id="1719641023" name="Date Placeholder 4"/>
           <p:cNvSpPr>
             <a:spLocks noGrp="1"/>
           </p:cNvSpPr>
@@ -3734,7 +3992,7 @@
       </p:sp>
       <p:sp>
         <p:nvSpPr>
-          <p:cNvPr id="1095178726" name="Footer Placeholder 5"/>
+          <p:cNvPr id="286859102" name="Footer Placeholder 5"/>
           <p:cNvSpPr>
             <a:spLocks noGrp="1"/>
           </p:cNvSpPr>
@@ -3756,7 +4014,7 @@
       </p:sp>
       <p:sp>
         <p:nvSpPr>
-          <p:cNvPr id="377120813" name="Slide Number Placeholder 6"/>
+          <p:cNvPr id="808387972" name="Slide Number Placeholder 6"/>
           <p:cNvSpPr>
             <a:spLocks noGrp="1"/>
           </p:cNvSpPr>
@@ -3807,7 +4065,7 @@
       </p:grpSpPr>
       <p:sp>
         <p:nvSpPr>
-          <p:cNvPr id="846141525" name="Title 1"/>
+          <p:cNvPr id="1535481226" name="Title 1"/>
           <p:cNvSpPr>
             <a:spLocks noGrp="1"/>
           </p:cNvSpPr>
@@ -3842,7 +4100,7 @@
       </p:sp>
       <p:sp>
         <p:nvSpPr>
-          <p:cNvPr id="442034403" name="Picture Placeholder 2"/>
+          <p:cNvPr id="978607701" name="Picture Placeholder 2"/>
           <p:cNvSpPr>
             <a:spLocks noGrp="1"/>
           </p:cNvSpPr>
@@ -3906,7 +4164,7 @@
       </p:sp>
       <p:sp>
         <p:nvSpPr>
-          <p:cNvPr id="644989023" name="Text Placeholder 3"/>
+          <p:cNvPr id="1969235468" name="Text Placeholder 3"/>
           <p:cNvSpPr>
             <a:spLocks noGrp="1"/>
           </p:cNvSpPr>
@@ -3974,7 +4232,7 @@
       </p:sp>
       <p:sp>
         <p:nvSpPr>
-          <p:cNvPr id="245319818" name="Date Placeholder 4"/>
+          <p:cNvPr id="2067868597" name="Date Placeholder 4"/>
           <p:cNvSpPr>
             <a:spLocks noGrp="1"/>
           </p:cNvSpPr>
@@ -4000,7 +4258,7 @@
       </p:sp>
       <p:sp>
         <p:nvSpPr>
-          <p:cNvPr id="280312567" name="Footer Placeholder 5"/>
+          <p:cNvPr id="129814206" name="Footer Placeholder 5"/>
           <p:cNvSpPr>
             <a:spLocks noGrp="1"/>
           </p:cNvSpPr>
@@ -4022,7 +4280,7 @@
       </p:sp>
       <p:sp>
         <p:nvSpPr>
-          <p:cNvPr id="1812672337" name="Slide Number Placeholder 6"/>
+          <p:cNvPr id="1481777667" name="Slide Number Placeholder 6"/>
           <p:cNvSpPr>
             <a:spLocks noGrp="1"/>
           </p:cNvSpPr>
@@ -4078,7 +4336,7 @@
       </p:grpSpPr>
       <p:sp>
         <p:nvSpPr>
-          <p:cNvPr id="1428242367" name="Shape 1059"/>
+          <p:cNvPr id="1204460982" name="Shape 1059"/>
           <p:cNvSpPr>
             <a:spLocks noChangeArrowheads="1" noGrp="1"/>
           </p:cNvSpPr>
@@ -4156,7 +4414,7 @@
       </p:sp>
       <p:sp>
         <p:nvSpPr>
-          <p:cNvPr id="1958134581" name="Shape 1060"/>
+          <p:cNvPr id="1777853965" name="Shape 1060"/>
           <p:cNvSpPr>
             <a:spLocks noChangeArrowheads="1" noGrp="1"/>
           </p:cNvSpPr>
@@ -4237,7 +4495,7 @@
       </p:sp>
       <p:sp>
         <p:nvSpPr>
-          <p:cNvPr id="244675532" name="Shape 1061"/>
+          <p:cNvPr id="1077272611" name="Shape 1061"/>
           <p:cNvSpPr>
             <a:spLocks noChangeArrowheads="1" noGrp="1"/>
           </p:cNvSpPr>
@@ -4355,7 +4613,7 @@
       </p:sp>
       <p:sp>
         <p:nvSpPr>
-          <p:cNvPr id="1931147852" name="Title 1"/>
+          <p:cNvPr id="1711158617" name="Title 1"/>
           <p:cNvSpPr>
             <a:spLocks noGrp="1"/>
           </p:cNvSpPr>
@@ -4391,7 +4649,7 @@
       </p:sp>
       <p:sp>
         <p:nvSpPr>
-          <p:cNvPr id="1929106275" name="Text Placeholder 2"/>
+          <p:cNvPr id="78878338" name="Text Placeholder 2"/>
           <p:cNvSpPr>
             <a:spLocks noGrp="1"/>
           </p:cNvSpPr>
@@ -4467,7 +4725,7 @@
       </p:sp>
       <p:sp>
         <p:nvSpPr>
-          <p:cNvPr id="992059474" name="Date Placeholder 3"/>
+          <p:cNvPr id="631219386" name="Date Placeholder 3"/>
           <p:cNvSpPr>
             <a:spLocks noGrp="1"/>
           </p:cNvSpPr>
@@ -4511,7 +4769,7 @@
       </p:sp>
       <p:sp>
         <p:nvSpPr>
-          <p:cNvPr id="229657647" name="Footer Placeholder 4"/>
+          <p:cNvPr id="594836196" name="Footer Placeholder 4"/>
           <p:cNvSpPr>
             <a:spLocks noGrp="1"/>
           </p:cNvSpPr>
@@ -4551,7 +4809,7 @@
       </p:sp>
       <p:sp>
         <p:nvSpPr>
-          <p:cNvPr id="1950787646" name="Slide Number Placeholder 5"/>
+          <p:cNvPr id="834925694" name="Slide Number Placeholder 5"/>
           <p:cNvSpPr>
             <a:spLocks noGrp="1"/>
           </p:cNvSpPr>
@@ -4899,7 +5157,7 @@
       </p:grpSpPr>
       <p:sp>
         <p:nvSpPr>
-          <p:cNvPr id="860517422" name="Title 1"/>
+          <p:cNvPr id="1371980970" name="Title 1"/>
           <p:cNvSpPr>
             <a:spLocks noGrp="1"/>
           </p:cNvSpPr>
@@ -4909,8 +5167,8 @@
         </p:nvSpPr>
         <p:spPr bwMode="auto">
           <a:xfrm flipH="0" flipV="0">
-            <a:off x="3107098" y="2381249"/>
-            <a:ext cx="8476179" cy="1938349"/>
+            <a:off x="802049" y="2381248"/>
+            <a:ext cx="10781226" cy="1938348"/>
           </a:xfrm>
         </p:spPr>
         <p:txBody>
@@ -4928,7 +5186,7 @@
             </a:r>
             <a:r>
               <a:rPr lang="en-US" sz="4800" b="1"/>
-              <a:t>Project</a:t>
+              <a:t>Evaluasi Tengah Semester (1, 8, 15 April)</a:t>
             </a:r>
             <a:endParaRPr sz="4800"/>
           </a:p>
@@ -4936,7 +5194,7 @@
       </p:sp>
       <p:sp>
         <p:nvSpPr>
-          <p:cNvPr id="379099720" name=""/>
+          <p:cNvPr id="1857255546" name=""/>
           <p:cNvSpPr txBox="1"/>
           <p:nvPr/>
         </p:nvSpPr>
@@ -5001,7 +5259,7 @@
       </p:grpSpPr>
       <p:sp>
         <p:nvSpPr>
-          <p:cNvPr id="1404532423" name="Title 1"/>
+          <p:cNvPr id="2028549918" name="Title 1"/>
           <p:cNvSpPr>
             <a:spLocks noGrp="1"/>
           </p:cNvSpPr>
@@ -5019,7 +5277,7 @@
             </a:pPr>
             <a:r>
               <a:rPr sz="3200"/>
-              <a:t>Karakteristik (5+3...V)</a:t>
+              <a:t>Karakteristik (5V yang pertama)</a:t>
             </a:r>
             <a:endParaRPr sz="3200"/>
           </a:p>
@@ -5027,7 +5285,7 @@
       </p:sp>
       <p:sp>
         <p:nvSpPr>
-          <p:cNvPr id="1113996478" name="Content Placeholder 2"/>
+          <p:cNvPr id="1760248315" name="Content Placeholder 2"/>
           <p:cNvSpPr>
             <a:spLocks noGrp="1"/>
           </p:cNvSpPr>
@@ -5035,7 +5293,12 @@
             <p:ph idx="1"/>
           </p:nvPr>
         </p:nvSpPr>
-        <p:spPr bwMode="auto"/>
+        <p:spPr bwMode="auto">
+          <a:xfrm flipH="0" flipV="0">
+            <a:off x="609598" y="1600200"/>
+            <a:ext cx="11046650" cy="4525961"/>
+          </a:xfrm>
+        </p:spPr>
         <p:txBody>
           <a:bodyPr vertOverflow="overflow" horzOverflow="overflow" vert="horz" wrap="square" lIns="91440" tIns="45720" rIns="91440" bIns="45720" numCol="1" spcCol="0" rtlCol="0" fromWordArt="0" anchor="t" anchorCtr="0" forceAA="0" upright="0" compatLnSpc="0">
             <a:normAutofit/>
@@ -5071,7 +5334,35 @@
                 <a:ea typeface="Arial"/>
                 <a:cs typeface="Arial"/>
               </a:rPr>
-              <a:t>(tera-petabyte, lah)</a:t>
+              <a:t>(ukuran kuantitatif ke-</a:t>
+            </a:r>
+            <a:r>
+              <a:rPr lang="en-US" sz="3200" b="0" i="1" u="none" strike="noStrike" cap="none" spc="0">
+                <a:solidFill>
+                  <a:schemeClr val="tx1">
+                    <a:lumMod val="75000"/>
+                    <a:lumOff val="25000"/>
+                  </a:schemeClr>
+                </a:solidFill>
+                <a:latin typeface="Arial"/>
+                <a:ea typeface="Arial"/>
+                <a:cs typeface="Arial"/>
+              </a:rPr>
+              <a:t>big</a:t>
+            </a:r>
+            <a:r>
+              <a:rPr lang="en-US" sz="3200" b="0" i="0" u="none" strike="noStrike" cap="none" spc="0">
+                <a:solidFill>
+                  <a:schemeClr val="tx1">
+                    <a:lumMod val="75000"/>
+                    <a:lumOff val="25000"/>
+                  </a:schemeClr>
+                </a:solidFill>
+                <a:latin typeface="Arial"/>
+                <a:ea typeface="Arial"/>
+                <a:cs typeface="Arial"/>
+              </a:rPr>
+              <a:t>-an dat, lah)</a:t>
             </a:r>
             <a:endParaRPr lang="en-US" sz="3200" b="0" i="0" u="none" strike="noStrike" cap="none" spc="0">
               <a:solidFill>
@@ -5115,7 +5406,7 @@
                 <a:ea typeface="Arial"/>
                 <a:cs typeface="Arial"/>
               </a:rPr>
-              <a:t>(terus bertambah)</a:t>
+              <a:t>(seberapa cepat terus bertambah)</a:t>
             </a:r>
             <a:endParaRPr lang="en-US" sz="3200" b="0" i="0" u="none" strike="noStrike" cap="none" spc="0">
               <a:solidFill>
@@ -5189,7 +5480,7 @@
                 <a:ea typeface="Arial"/>
                 <a:cs typeface="Arial"/>
               </a:rPr>
-              <a:t>Veracity (tingkat keakuratan dan keandalan data)</a:t>
+              <a:t>Veracity (tingkat keakuratan, resolusi, dan keandalan data)</a:t>
             </a:r>
             <a:endParaRPr lang="en-US" sz="3200" b="0" i="0" u="none" strike="noStrike" cap="none" spc="0">
               <a:solidFill>
@@ -5222,6 +5513,20 @@
               <a:t>Value (</a:t>
             </a:r>
             <a:r>
+              <a:rPr lang="en-US" sz="3200" b="0" i="0" u="none" strike="noStrike" cap="none" spc="0">
+                <a:solidFill>
+                  <a:schemeClr val="tx1">
+                    <a:lumMod val="75000"/>
+                    <a:lumOff val="25000"/>
+                  </a:schemeClr>
+                </a:solidFill>
+                <a:latin typeface="Arial"/>
+                <a:ea typeface="Arial"/>
+                <a:cs typeface="Arial"/>
+              </a:rPr>
+              <a:t>informasi yang bisa diturunkan, </a:t>
+            </a:r>
+            <a:r>
               <a:rPr lang="en-US" sz="3200" b="0" i="1" u="none" strike="noStrike" cap="none" spc="0">
                 <a:solidFill>
                   <a:schemeClr val="tx1">
@@ -5276,112 +5581,6 @@
                 <a:cs typeface="Arial"/>
               </a:rPr>
               <a:t>)</a:t>
-            </a:r>
-            <a:endParaRPr lang="en-US" sz="3200" b="0" i="0" u="none" strike="noStrike" cap="none" spc="0">
-              <a:solidFill>
-                <a:schemeClr val="tx1">
-                  <a:lumMod val="75000"/>
-                  <a:lumOff val="25000"/>
-                </a:schemeClr>
-              </a:solidFill>
-              <a:latin typeface="Arial"/>
-              <a:ea typeface="Arial"/>
-              <a:cs typeface="Arial"/>
-            </a:endParaRPr>
-          </a:p>
-          <a:p>
-            <a:pPr>
-              <a:defRPr/>
-            </a:pPr>
-            <a:endParaRPr lang="en-US" sz="3200" b="0" i="0" u="none" strike="noStrike" cap="none" spc="0">
-              <a:solidFill>
-                <a:schemeClr val="tx1">
-                  <a:lumMod val="75000"/>
-                  <a:lumOff val="25000"/>
-                </a:schemeClr>
-              </a:solidFill>
-              <a:latin typeface="Arial"/>
-              <a:ea typeface="Arial"/>
-              <a:cs typeface="Arial"/>
-            </a:endParaRPr>
-          </a:p>
-          <a:p>
-            <a:pPr>
-              <a:defRPr/>
-            </a:pPr>
-            <a:r>
-              <a:rPr lang="en-US" sz="3200" b="0" i="0" u="none" strike="noStrike" cap="none" spc="0">
-                <a:solidFill>
-                  <a:schemeClr val="tx1">
-                    <a:lumMod val="75000"/>
-                    <a:lumOff val="25000"/>
-                  </a:schemeClr>
-                </a:solidFill>
-                <a:latin typeface="Arial"/>
-                <a:ea typeface="Arial"/>
-                <a:cs typeface="Arial"/>
-              </a:rPr>
-              <a:t>Variability (perubahan pola)</a:t>
-            </a:r>
-            <a:endParaRPr lang="en-US" sz="3200" b="0" i="0" u="none" strike="noStrike" cap="none" spc="0">
-              <a:solidFill>
-                <a:schemeClr val="tx1">
-                  <a:lumMod val="75000"/>
-                  <a:lumOff val="25000"/>
-                </a:schemeClr>
-              </a:solidFill>
-              <a:latin typeface="Arial"/>
-              <a:ea typeface="Arial"/>
-              <a:cs typeface="Arial"/>
-            </a:endParaRPr>
-          </a:p>
-          <a:p>
-            <a:pPr>
-              <a:defRPr/>
-            </a:pPr>
-            <a:r>
-              <a:rPr lang="en-US" sz="3200" b="0" i="0" u="none" strike="noStrike" cap="none" spc="0">
-                <a:solidFill>
-                  <a:schemeClr val="tx1">
-                    <a:lumMod val="75000"/>
-                    <a:lumOff val="25000"/>
-                  </a:schemeClr>
-                </a:solidFill>
-                <a:latin typeface="Arial"/>
-                <a:ea typeface="Arial"/>
-                <a:cs typeface="Arial"/>
-              </a:rPr>
-              <a:t>Volatility (kadang ada, kadang tiada)</a:t>
-            </a:r>
-            <a:endParaRPr lang="en-US" sz="3200" b="0" i="0" u="none" strike="noStrike" cap="none" spc="0">
-              <a:solidFill>
-                <a:schemeClr val="tx1">
-                  <a:lumMod val="75000"/>
-                  <a:lumOff val="25000"/>
-                </a:schemeClr>
-              </a:solidFill>
-              <a:latin typeface="Arial"/>
-              <a:ea typeface="Arial"/>
-              <a:cs typeface="Arial"/>
-            </a:endParaRPr>
-          </a:p>
-          <a:p>
-            <a:pPr>
-              <a:defRPr/>
-            </a:pPr>
-            <a:r>
-              <a:rPr lang="en-US" sz="3200" b="0" i="0" u="none" strike="noStrike" cap="none" spc="0">
-                <a:solidFill>
-                  <a:schemeClr val="tx1">
-                    <a:lumMod val="75000"/>
-                    <a:lumOff val="25000"/>
-                  </a:schemeClr>
-                </a:solidFill>
-                <a:latin typeface="Arial"/>
-                <a:ea typeface="Arial"/>
-                <a:cs typeface="Arial"/>
-              </a:rPr>
-              <a:t>Visualization (digest, cuplikan informatif)</a:t>
             </a:r>
             <a:endParaRPr lang="en-US" sz="3200" b="0" i="0" u="none" strike="noStrike" cap="none" spc="0">
               <a:solidFill>
@@ -5432,7 +5631,7 @@
       </p:grpSpPr>
       <p:sp>
         <p:nvSpPr>
-          <p:cNvPr id="855409243" name="Title 1"/>
+          <p:cNvPr id="1182122045" name="Title 1"/>
           <p:cNvSpPr>
             <a:spLocks noGrp="1"/>
           </p:cNvSpPr>
@@ -5450,11 +5649,7 @@
             </a:pPr>
             <a:r>
               <a:rPr sz="3200"/>
-              <a:t>Struktur Portfolio</a:t>
-            </a:r>
-            <a:r>
-              <a:rPr sz="3200"/>
-              <a:t>: sebelum ETS</a:t>
+              <a:t>Aktivitas ETS: presentasi, dinilai rekan sekelas</a:t>
             </a:r>
             <a:endParaRPr sz="3200"/>
           </a:p>
@@ -5462,7 +5657,7 @@
       </p:sp>
       <p:sp>
         <p:nvSpPr>
-          <p:cNvPr id="1391793367" name="Content Placeholder 2"/>
+          <p:cNvPr id="654552801" name="Content Placeholder 2"/>
           <p:cNvSpPr>
             <a:spLocks noGrp="1"/>
           </p:cNvSpPr>
@@ -5471,16 +5666,90 @@
           </p:nvPr>
         </p:nvSpPr>
         <p:spPr bwMode="auto">
-          <a:xfrm>
+          <a:xfrm flipH="0" flipV="0">
             <a:off x="609598" y="1600200"/>
-            <a:ext cx="10972800" cy="4525961"/>
+            <a:ext cx="11565300" cy="5181598"/>
           </a:xfrm>
         </p:spPr>
         <p:txBody>
           <a:bodyPr vertOverflow="overflow" horzOverflow="overflow" vert="horz" wrap="square" lIns="91440" tIns="45720" rIns="91440" bIns="45720" numCol="1" spcCol="0" rtlCol="0" fromWordArt="0" anchor="t" anchorCtr="0" forceAA="0" upright="0" compatLnSpc="0">
-            <a:normAutofit/>
+            <a:normAutofit fontScale="95000" lnSpcReduction="1000"/>
           </a:bodyPr>
           <a:lstStyle/>
+          <a:p>
+            <a:pPr marL="0" indent="0">
+              <a:buFont typeface="Arial"/>
+              <a:buNone/>
+              <a:defRPr/>
+            </a:pPr>
+            <a:r>
+              <a:rPr lang="en-US" sz="3200" b="1" i="0" u="none" strike="noStrike" cap="none" spc="0">
+                <a:solidFill>
+                  <a:schemeClr val="tx1">
+                    <a:lumMod val="75000"/>
+                    <a:lumOff val="25000"/>
+                  </a:schemeClr>
+                </a:solidFill>
+                <a:latin typeface="Arial"/>
+                <a:ea typeface="Arial"/>
+                <a:cs typeface="Arial"/>
+              </a:rPr>
+              <a:t>Struktur </a:t>
+            </a:r>
+            <a:r>
+              <a:rPr lang="en-US" sz="3200" b="1" i="0" u="none" strike="noStrike" cap="none" spc="0">
+                <a:solidFill>
+                  <a:schemeClr val="tx1">
+                    <a:lumMod val="75000"/>
+                    <a:lumOff val="25000"/>
+                  </a:schemeClr>
+                </a:solidFill>
+                <a:latin typeface="Arial"/>
+                <a:ea typeface="Arial"/>
+                <a:cs typeface="Arial"/>
+              </a:rPr>
+              <a:t>urutan</a:t>
+            </a:r>
+            <a:r>
+              <a:rPr lang="en-US" sz="3200" b="1" i="0" u="none" strike="noStrike" cap="none" spc="0">
+                <a:solidFill>
+                  <a:schemeClr val="tx1">
+                    <a:lumMod val="75000"/>
+                    <a:lumOff val="25000"/>
+                  </a:schemeClr>
+                </a:solidFill>
+                <a:latin typeface="Arial"/>
+                <a:ea typeface="Arial"/>
+                <a:cs typeface="Arial"/>
+              </a:rPr>
+              <a:t> </a:t>
+            </a:r>
+            <a:r>
+              <a:rPr lang="en-US" sz="3200" b="1" i="0" u="none" strike="noStrike" cap="none" spc="0">
+                <a:solidFill>
+                  <a:schemeClr val="tx1">
+                    <a:lumMod val="75000"/>
+                    <a:lumOff val="25000"/>
+                  </a:schemeClr>
+                </a:solidFill>
+                <a:latin typeface="Arial"/>
+                <a:ea typeface="Arial"/>
+                <a:cs typeface="Arial"/>
+              </a:rPr>
+              <a:t>slide:</a:t>
+            </a:r>
+            <a:endParaRPr lang="en-US" sz="3200" b="0" i="0" u="none" strike="noStrike" cap="none" spc="0">
+              <a:solidFill>
+                <a:schemeClr val="tx1">
+                  <a:lumMod val="75000"/>
+                  <a:lumOff val="25000"/>
+                </a:schemeClr>
+              </a:solidFill>
+              <a:latin typeface="Arial"/>
+              <a:ea typeface="Arial"/>
+              <a:cs typeface="Arial"/>
+            </a:endParaRPr>
+          </a:p>
           <a:p>
             <a:pPr>
               <a:defRPr/>
@@ -5497,7 +5766,21 @@
                 <a:ea typeface="Arial"/>
                 <a:cs typeface="Arial"/>
               </a:rPr>
-              <a:t>Latar belakang mengapa penting, urgen, atau menarik</a:t>
+              <a:t>Latar belakang [dan tujuan]: </a:t>
+            </a:r>
+            <a:r>
+              <a:rPr lang="en-US" sz="3200" b="0" i="0" u="none" strike="noStrike" cap="none" spc="0">
+                <a:solidFill>
+                  <a:schemeClr val="tx1">
+                    <a:lumMod val="75000"/>
+                    <a:lumOff val="25000"/>
+                  </a:schemeClr>
+                </a:solidFill>
+                <a:latin typeface="Arial"/>
+                <a:ea typeface="Arial"/>
+                <a:cs typeface="Arial"/>
+              </a:rPr>
+              <a:t>mengapa penting atau menarik?</a:t>
             </a:r>
             <a:endParaRPr lang="en-US" sz="3200" b="0" i="0" u="none" strike="noStrike" cap="none" spc="0">
               <a:solidFill>
@@ -5527,22 +5810,24 @@
                 <a:ea typeface="Arial"/>
                 <a:cs typeface="Arial"/>
               </a:rPr>
-              <a:t>Sumber data, metode akuisisi, penilaian </a:t>
-            </a:r>
-            <a:r>
-              <a:rPr lang="en-US" sz="3200" b="1" i="0" u="none" strike="noStrike" cap="none" spc="0">
-                <a:solidFill>
-                  <a:schemeClr val="tx1">
-                    <a:lumMod val="75000"/>
-                    <a:lumOff val="25000"/>
-                  </a:schemeClr>
-                </a:solidFill>
-                <a:latin typeface="Arial"/>
-                <a:ea typeface="Arial"/>
-                <a:cs typeface="Arial"/>
-              </a:rPr>
-              <a:t>5V </a:t>
-            </a:r>
+              <a:t>Metode akuisisi data, spesifikasi data, sampel cuplikan</a:t>
+            </a:r>
+            <a:endParaRPr lang="en-US" sz="3200" b="0" i="0" u="none" strike="noStrike" cap="none" spc="0">
+              <a:solidFill>
+                <a:schemeClr val="tx1">
+                  <a:lumMod val="75000"/>
+                  <a:lumOff val="25000"/>
+                </a:schemeClr>
+              </a:solidFill>
+              <a:latin typeface="Arial"/>
+              <a:ea typeface="Arial"/>
+              <a:cs typeface="Arial"/>
+            </a:endParaRPr>
+          </a:p>
+          <a:p>
+            <a:pPr>
+              <a:defRPr/>
+            </a:pPr>
             <a:r>
               <a:rPr lang="en-US" sz="3200" b="0" i="0" u="none" strike="noStrike" cap="none" spc="0">
                 <a:solidFill>
@@ -5555,9 +5840,9 @@
                 <a:ea typeface="Arial"/>
                 <a:cs typeface="Arial"/>
               </a:rPr>
-              <a:t>pertama</a:t>
-            </a:r>
-            <a:endParaRPr sz="3200" b="0" i="0" u="none" strike="noStrike" cap="none" spc="0">
+              <a:t>Masing-masing aspek 5V dijabarkan pada slide terpisah (volume, velocity, variety, veracity, value)</a:t>
+            </a:r>
+            <a:endParaRPr lang="en-US" sz="3200" b="0" i="0" u="none" strike="noStrike" cap="none" spc="0">
               <a:solidFill>
                 <a:schemeClr val="tx1">
                   <a:lumMod val="75000"/>
@@ -5585,7 +5870,7 @@
                 <a:ea typeface="Arial"/>
                 <a:cs typeface="Arial"/>
               </a:rPr>
-              <a:t>Data yang diapat dan bagaimana wrangling (normalisasi, penyeragaman, etc)</a:t>
+              <a:t>Analisis/insight sementara yang didapat</a:t>
             </a:r>
             <a:endParaRPr lang="en-US" sz="3200" b="0" i="0" u="none" strike="noStrike" cap="none" spc="0">
               <a:solidFill>
@@ -5645,7 +5930,83 @@
               </a:rPr>
               <a:t>model analisis</a:t>
             </a:r>
-            <a:endParaRPr sz="3200" b="0" i="0" u="none" strike="noStrike" cap="none" spc="0">
+            <a:endParaRPr lang="en-US" sz="3200" b="0" i="0" u="none" strike="noStrike" cap="none" spc="0">
+              <a:solidFill>
+                <a:schemeClr val="tx1">
+                  <a:lumMod val="75000"/>
+                  <a:lumOff val="25000"/>
+                </a:schemeClr>
+              </a:solidFill>
+              <a:latin typeface="Arial"/>
+              <a:ea typeface="Arial"/>
+              <a:cs typeface="Arial"/>
+            </a:endParaRPr>
+          </a:p>
+          <a:p>
+            <a:pPr>
+              <a:defRPr/>
+            </a:pPr>
+            <a:endParaRPr lang="en-US" sz="3200" b="0" i="0" u="none" strike="noStrike" cap="none" spc="0">
+              <a:solidFill>
+                <a:schemeClr val="tx1">
+                  <a:lumMod val="75000"/>
+                  <a:lumOff val="25000"/>
+                </a:schemeClr>
+              </a:solidFill>
+              <a:latin typeface="Arial"/>
+              <a:ea typeface="Arial"/>
+              <a:cs typeface="Arial"/>
+            </a:endParaRPr>
+          </a:p>
+          <a:p>
+            <a:pPr marL="0" indent="0">
+              <a:buFont typeface="Arial"/>
+              <a:buNone/>
+              <a:defRPr/>
+            </a:pPr>
+            <a:r>
+              <a:rPr lang="en-US" sz="3200" b="0" i="0" u="none" strike="noStrike" cap="none" spc="0">
+                <a:solidFill>
+                  <a:schemeClr val="tx1">
+                    <a:lumMod val="75000"/>
+                    <a:lumOff val="25000"/>
+                  </a:schemeClr>
+                </a:solidFill>
+                <a:latin typeface="Arial"/>
+                <a:ea typeface="Arial"/>
+                <a:cs typeface="Arial"/>
+              </a:rPr>
+              <a:t>Kurangi gambar ilustrasi </a:t>
+            </a:r>
+            <a:r>
+              <a:rPr lang="en-US" sz="3200" b="0" i="1" u="none" strike="noStrike" cap="none" spc="0">
+                <a:solidFill>
+                  <a:schemeClr val="tx1">
+                    <a:lumMod val="75000"/>
+                    <a:lumOff val="25000"/>
+                  </a:schemeClr>
+                </a:solidFill>
+                <a:latin typeface="Arial"/>
+                <a:ea typeface="Arial"/>
+                <a:cs typeface="Arial"/>
+              </a:rPr>
+              <a:t>filler </a:t>
+            </a:r>
+            <a:r>
+              <a:rPr lang="en-US" sz="3200" b="0" i="0" u="none" strike="noStrike" cap="none" spc="0">
+                <a:solidFill>
+                  <a:schemeClr val="tx1">
+                    <a:lumMod val="75000"/>
+                    <a:lumOff val="25000"/>
+                  </a:schemeClr>
+                </a:solidFill>
+                <a:latin typeface="Arial"/>
+                <a:ea typeface="Arial"/>
+                <a:cs typeface="Arial"/>
+              </a:rPr>
+              <a:t>yang tidak secara langsung relevan*</a:t>
+            </a:r>
+            <a:endParaRPr lang="en-US" sz="3200" b="0" i="0" u="none" strike="noStrike" cap="none" spc="0">
               <a:solidFill>
                 <a:schemeClr val="tx1">
                   <a:lumMod val="75000"/>
@@ -5692,295 +6053,125 @@
           <a:chExt cx="0" cy="0"/>
         </a:xfrm>
       </p:grpSpPr>
-      <p:sp>
-        <p:nvSpPr>
-          <p:cNvPr id="1698319057" name="Title 1"/>
-          <p:cNvSpPr>
-            <a:spLocks noGrp="1"/>
-          </p:cNvSpPr>
-          <p:nvPr>
-            <p:ph type="title"/>
-          </p:nvPr>
-        </p:nvSpPr>
-        <p:spPr bwMode="auto"/>
-        <p:txBody>
-          <a:bodyPr/>
-          <a:lstStyle/>
-          <a:p>
-            <a:pPr algn="l">
-              <a:defRPr/>
-            </a:pPr>
-            <a:r>
-              <a:rPr sz="3200"/>
-              <a:t>Struktur Portfolio</a:t>
-            </a:r>
-            <a:r>
-              <a:rPr sz="3200"/>
-              <a:t>: setelah ETS</a:t>
-            </a:r>
-            <a:r>
-              <a:rPr sz="3200"/>
-              <a:t> sampai EAS</a:t>
-            </a:r>
-            <a:endParaRPr sz="3200"/>
-          </a:p>
-        </p:txBody>
-      </p:sp>
-      <p:sp>
-        <p:nvSpPr>
-          <p:cNvPr id="2067170341" name="Content Placeholder 2"/>
-          <p:cNvSpPr>
-            <a:spLocks noGrp="1"/>
-          </p:cNvSpPr>
-          <p:nvPr>
-            <p:ph idx="1"/>
-          </p:nvPr>
-        </p:nvSpPr>
+      <p:pic>
+        <p:nvPicPr>
+          <p:cNvPr id="477174955" name=""/>
+          <p:cNvPicPr>
+            <a:picLocks noChangeAspect="1"/>
+          </p:cNvPicPr>
+          <p:nvPr/>
+        </p:nvPicPr>
+        <p:blipFill>
+          <a:blip r:embed="rId3"/>
+          <a:srcRect l="6133" t="12900" r="3765" b="0"/>
+          <a:stretch/>
+        </p:blipFill>
         <p:spPr bwMode="auto">
-          <a:xfrm>
-            <a:off x="609597" y="1600200"/>
-            <a:ext cx="10972800" cy="4525960"/>
+          <a:xfrm flipH="0" flipV="0">
+            <a:off x="421049" y="0"/>
+            <a:ext cx="10685530" cy="6419849"/>
           </a:xfrm>
+          <a:prstGeom prst="rect">
+            <a:avLst/>
+          </a:prstGeom>
         </p:spPr>
-        <p:txBody>
-          <a:bodyPr vertOverflow="overflow" horzOverflow="overflow" vert="horz" wrap="square" lIns="91440" tIns="45720" rIns="91440" bIns="45720" numCol="1" spcCol="0" rtlCol="0" fromWordArt="0" anchor="t" anchorCtr="0" forceAA="0" upright="0" compatLnSpc="0">
-            <a:normAutofit/>
+      </p:pic>
+      <p:pic>
+        <p:nvPicPr>
+          <p:cNvPr id="2143642338" name=""/>
+          <p:cNvPicPr>
+            <a:picLocks noChangeAspect="1"/>
+          </p:cNvPicPr>
+          <p:nvPr/>
+        </p:nvPicPr>
+        <p:blipFill>
+          <a:blip r:embed="rId4"/>
+          <a:stretch/>
+        </p:blipFill>
+        <p:spPr bwMode="auto">
+          <a:xfrm flipH="0" flipV="0">
+            <a:off x="6095999" y="4712240"/>
+            <a:ext cx="5850299" cy="1917159"/>
+          </a:xfrm>
+          <a:prstGeom prst="rect">
+            <a:avLst/>
+          </a:prstGeom>
+        </p:spPr>
+      </p:pic>
+      <p:cxnSp>
+        <p:nvCxnSpPr>
+          <p:cNvPr id="2131479040" name=""/>
+          <p:cNvCxnSpPr/>
+          <p:nvPr/>
+        </p:nvCxnSpPr>
+        <p:spPr bwMode="auto">
+          <a:xfrm flipH="1" flipV="0">
+            <a:off x="7298100" y="361949"/>
+            <a:ext cx="3486150" cy="3009899"/>
+          </a:xfrm>
+          <a:prstGeom prst="line">
+            <a:avLst/>
+          </a:prstGeom>
+          <a:ln w="76199" cap="flat" cmpd="sng" algn="ctr">
+            <a:solidFill>
+              <a:srgbClr val="FF0000"/>
+            </a:solidFill>
+            <a:prstDash val="solid"/>
+          </a:ln>
+        </p:spPr>
+        <p:style>
+          <a:lnRef idx="1">
+            <a:schemeClr val="accent1">
+              <a:shade val="50000"/>
+            </a:schemeClr>
+          </a:lnRef>
+          <a:fillRef idx="0">
+            <a:schemeClr val="accent1"/>
+          </a:fillRef>
+          <a:effectRef idx="0">
+            <a:schemeClr val="accent1"/>
+          </a:effectRef>
+          <a:fontRef idx="minor">
+            <a:schemeClr val="tx1"/>
+          </a:fontRef>
+        </p:style>
+      </p:cxnSp>
+      <p:sp>
+        <p:nvSpPr>
+          <p:cNvPr id="51722391" name=""/>
+          <p:cNvSpPr txBox="1"/>
+          <p:nvPr/>
+        </p:nvSpPr>
+        <p:spPr bwMode="auto">
+          <a:xfrm rot="0" flipH="0" flipV="0">
+            <a:off x="2726099" y="2743199"/>
+            <a:ext cx="928334" cy="1554840"/>
+          </a:xfrm>
+          <a:prstGeom prst="rect">
+            <a:avLst/>
+          </a:prstGeom>
+          <a:noFill/>
+        </p:spPr>
+        <p:txBody>
+          <a:bodyPr vertOverflow="overflow" horzOverflow="overflow" vert="horz" wrap="none" lIns="91440" tIns="45720" rIns="91440" bIns="45720" numCol="1" spcCol="0" rtlCol="0" fromWordArt="0" anchor="t" anchorCtr="0" forceAA="0" upright="0" compatLnSpc="0">
+            <a:spAutoFit/>
           </a:bodyPr>
-          <a:lstStyle/>
-          <a:p>
-            <a:pPr>
-              <a:defRPr/>
-            </a:pPr>
-            <a:r>
-              <a:rPr lang="en-US" sz="3200" b="0" i="0" u="none" strike="noStrike" cap="none" spc="0">
+          <a:p>
+            <a:pPr>
+              <a:defRPr/>
+            </a:pPr>
+            <a:r>
+              <a:rPr sz="9600" b="1">
                 <a:solidFill>
-                  <a:schemeClr val="tx1">
-                    <a:lumMod val="75000"/>
-                    <a:lumOff val="25000"/>
-                  </a:schemeClr>
+                  <a:srgbClr val="FF0000"/>
                 </a:solidFill>
-                <a:latin typeface="Arial"/>
-                <a:ea typeface="Arial"/>
-                <a:cs typeface="Arial"/>
               </a:rPr>
-              <a:t>Metode pengolahan: </a:t>
-            </a:r>
-            <a:r>
-              <a:rPr lang="en-US" sz="3200" b="0" i="1" u="none" strike="noStrike" cap="none" spc="0">
-                <a:solidFill>
-                  <a:schemeClr val="tx1">
-                    <a:lumMod val="75000"/>
-                    <a:lumOff val="25000"/>
-                  </a:schemeClr>
-                </a:solidFill>
-                <a:latin typeface="Arial"/>
-                <a:ea typeface="Arial"/>
-                <a:cs typeface="Arial"/>
-              </a:rPr>
-              <a:t>feature extraction, pattern recognition, </a:t>
-            </a:r>
-            <a:r>
-              <a:rPr lang="en-US" sz="3200" b="0" i="1" u="none" strike="noStrike" cap="none" spc="0">
-                <a:solidFill>
-                  <a:schemeClr val="tx1">
-                    <a:lumMod val="75000"/>
-                    <a:lumOff val="25000"/>
-                  </a:schemeClr>
-                </a:solidFill>
-                <a:latin typeface="Arial"/>
-                <a:ea typeface="Arial"/>
-                <a:cs typeface="Arial"/>
-              </a:rPr>
-              <a:t>optimization</a:t>
-            </a:r>
-            <a:r>
-              <a:rPr lang="en-US" sz="3200" b="0" i="0" u="none" strike="noStrike" cap="none" spc="0">
-                <a:solidFill>
-                  <a:schemeClr val="tx1">
-                    <a:lumMod val="75000"/>
-                    <a:lumOff val="25000"/>
-                  </a:schemeClr>
-                </a:solidFill>
-                <a:latin typeface="Arial"/>
-                <a:ea typeface="Arial"/>
-                <a:cs typeface="Arial"/>
-              </a:rPr>
-              <a:t>, etc.</a:t>
-            </a:r>
-            <a:endParaRPr lang="en-US" sz="3200" b="0" i="0" u="none" strike="noStrike" cap="none" spc="0">
+              <a:t>?</a:t>
+            </a:r>
+            <a:endParaRPr sz="9600" b="1">
               <a:solidFill>
-                <a:schemeClr val="tx1">
-                  <a:lumMod val="75000"/>
-                  <a:lumOff val="25000"/>
-                </a:schemeClr>
+                <a:srgbClr val="FF0000"/>
               </a:solidFill>
-              <a:latin typeface="Arial"/>
-              <a:ea typeface="Arial"/>
-              <a:cs typeface="Arial"/>
-            </a:endParaRPr>
-          </a:p>
-          <a:p>
-            <a:pPr>
-              <a:defRPr/>
-            </a:pPr>
-            <a:r>
-              <a:rPr lang="en-US" sz="3200" b="0" i="0" u="none" strike="noStrike" cap="none" spc="0">
-                <a:solidFill>
-                  <a:schemeClr val="tx1">
-                    <a:lumMod val="75000"/>
-                    <a:lumOff val="25000"/>
-                  </a:schemeClr>
-                </a:solidFill>
-                <a:latin typeface="Arial"/>
-                <a:ea typeface="Arial"/>
-                <a:cs typeface="Arial"/>
-              </a:rPr>
-              <a:t>Visualisasi sebagai insight, bahan pertimbangan eksekutif</a:t>
-            </a:r>
-            <a:endParaRPr lang="en-US" sz="3200" b="0" i="0" u="none" strike="noStrike" cap="none" spc="0">
-              <a:solidFill>
-                <a:schemeClr val="tx1">
-                  <a:lumMod val="75000"/>
-                  <a:lumOff val="25000"/>
-                </a:schemeClr>
-              </a:solidFill>
-              <a:latin typeface="Arial"/>
-              <a:ea typeface="Arial"/>
-              <a:cs typeface="Arial"/>
-            </a:endParaRPr>
-          </a:p>
-          <a:p>
-            <a:pPr>
-              <a:defRPr/>
-            </a:pPr>
-            <a:r>
-              <a:rPr lang="en-US" sz="3200" b="0" i="0" u="none" strike="noStrike" cap="none" spc="0">
-                <a:solidFill>
-                  <a:schemeClr val="tx1">
-                    <a:lumMod val="75000"/>
-                    <a:lumOff val="25000"/>
-                  </a:schemeClr>
-                </a:solidFill>
-                <a:latin typeface="Arial"/>
-                <a:ea typeface="Arial"/>
-                <a:cs typeface="Arial"/>
-              </a:rPr>
-              <a:t>Tambahan update data dengan data yang lebih baru</a:t>
-            </a:r>
-            <a:endParaRPr lang="en-US" sz="3200" b="0" i="0" u="none" strike="noStrike" cap="none" spc="0">
-              <a:solidFill>
-                <a:schemeClr val="tx1">
-                  <a:lumMod val="75000"/>
-                  <a:lumOff val="25000"/>
-                </a:schemeClr>
-              </a:solidFill>
-              <a:latin typeface="Arial"/>
-              <a:ea typeface="Arial"/>
-              <a:cs typeface="Arial"/>
-            </a:endParaRPr>
-          </a:p>
-          <a:p>
-            <a:pPr>
-              <a:defRPr/>
-            </a:pPr>
-            <a:r>
-              <a:rPr lang="en-US" sz="3200" b="0" i="0" u="none" strike="noStrike" cap="none" spc="0">
-                <a:solidFill>
-                  <a:schemeClr val="tx1">
-                    <a:lumMod val="75000"/>
-                    <a:lumOff val="25000"/>
-                  </a:schemeClr>
-                </a:solidFill>
-                <a:latin typeface="Arial"/>
-                <a:ea typeface="Arial"/>
-                <a:cs typeface="Arial"/>
-              </a:rPr>
-              <a:t>Bagaimana handle data saat tidak ada data: Inputasi? Replikasi? Ambil dari sumber lain?</a:t>
-            </a:r>
-            <a:endParaRPr lang="en-US" sz="3200" b="0" i="0" u="none" strike="noStrike" cap="none" spc="0">
-              <a:solidFill>
-                <a:schemeClr val="tx1">
-                  <a:lumMod val="75000"/>
-                  <a:lumOff val="25000"/>
-                </a:schemeClr>
-              </a:solidFill>
-              <a:latin typeface="Arial"/>
-              <a:ea typeface="Arial"/>
-              <a:cs typeface="Arial"/>
-            </a:endParaRPr>
-          </a:p>
-          <a:p>
-            <a:pPr>
-              <a:defRPr/>
-            </a:pPr>
-            <a:r>
-              <a:rPr lang="en-US" sz="3200" b="0" i="0" u="none" strike="noStrike" cap="none" spc="0">
-                <a:solidFill>
-                  <a:schemeClr val="tx1">
-                    <a:lumMod val="75000"/>
-                    <a:lumOff val="25000"/>
-                  </a:schemeClr>
-                </a:solidFill>
-                <a:latin typeface="Arial"/>
-                <a:ea typeface="Arial"/>
-                <a:cs typeface="Arial"/>
-              </a:rPr>
-              <a:t>Rating </a:t>
-            </a:r>
-            <a:r>
-              <a:rPr lang="en-US" sz="3200" b="1" i="0" u="none" strike="noStrike" cap="none" spc="0">
-                <a:solidFill>
-                  <a:schemeClr val="tx1">
-                    <a:lumMod val="75000"/>
-                    <a:lumOff val="25000"/>
-                  </a:schemeClr>
-                </a:solidFill>
-                <a:latin typeface="Arial"/>
-                <a:ea typeface="Arial"/>
-                <a:cs typeface="Arial"/>
-              </a:rPr>
-              <a:t>3V</a:t>
-            </a:r>
-            <a:r>
-              <a:rPr lang="en-US" sz="3200" b="0" i="0" u="none" strike="noStrike" cap="none" spc="0">
-                <a:solidFill>
-                  <a:schemeClr val="tx1">
-                    <a:lumMod val="75000"/>
-                    <a:lumOff val="25000"/>
-                  </a:schemeClr>
-                </a:solidFill>
-                <a:latin typeface="Arial"/>
-                <a:ea typeface="Arial"/>
-                <a:cs typeface="Arial"/>
-              </a:rPr>
-              <a:t> yang terakhir</a:t>
-            </a:r>
-            <a:endParaRPr lang="en-US" sz="3200" b="0" i="0" u="none" strike="noStrike" cap="none" spc="0">
-              <a:solidFill>
-                <a:schemeClr val="tx1">
-                  <a:lumMod val="75000"/>
-                  <a:lumOff val="25000"/>
-                </a:schemeClr>
-              </a:solidFill>
-              <a:latin typeface="Arial"/>
-              <a:ea typeface="Arial"/>
-              <a:cs typeface="Arial"/>
-            </a:endParaRPr>
-          </a:p>
-          <a:p>
-            <a:pPr>
-              <a:defRPr/>
-            </a:pPr>
-            <a:endParaRPr sz="3200" b="0" i="0" u="none" strike="noStrike" cap="none" spc="0">
-              <a:solidFill>
-                <a:schemeClr val="tx1">
-                  <a:lumMod val="75000"/>
-                  <a:lumOff val="25000"/>
-                </a:schemeClr>
-              </a:solidFill>
-              <a:latin typeface="Arial"/>
-              <a:ea typeface="Arial"/>
-              <a:cs typeface="Arial"/>
             </a:endParaRPr>
           </a:p>
         </p:txBody>
@@ -6018,9 +6209,218 @@
           <a:chExt cx="0" cy="0"/>
         </a:xfrm>
       </p:grpSpPr>
-      <p:sp>
-        <p:nvSpPr>
-          <p:cNvPr id="1990734652" name="Title 1"/>
+      <p:pic>
+        <p:nvPicPr>
+          <p:cNvPr id="1264313683" name=""/>
+          <p:cNvPicPr>
+            <a:picLocks noChangeAspect="1"/>
+          </p:cNvPicPr>
+          <p:nvPr/>
+        </p:nvPicPr>
+        <p:blipFill>
+          <a:blip r:embed="rId3"/>
+          <a:stretch/>
+        </p:blipFill>
+        <p:spPr bwMode="auto">
+          <a:xfrm flipH="0" flipV="0">
+            <a:off x="457199" y="209549"/>
+            <a:ext cx="11010208" cy="6134099"/>
+          </a:xfrm>
+          <a:prstGeom prst="rect">
+            <a:avLst/>
+          </a:prstGeom>
+        </p:spPr>
+      </p:pic>
+      <p:pic>
+        <p:nvPicPr>
+          <p:cNvPr id="331209014" name=""/>
+          <p:cNvPicPr>
+            <a:picLocks noChangeAspect="1"/>
+          </p:cNvPicPr>
+          <p:nvPr/>
+        </p:nvPicPr>
+        <p:blipFill>
+          <a:blip r:embed="rId4"/>
+          <a:stretch/>
+        </p:blipFill>
+        <p:spPr bwMode="auto">
+          <a:xfrm>
+            <a:off x="9372600" y="4000499"/>
+            <a:ext cx="1828800" cy="1952624"/>
+          </a:xfrm>
+          <a:prstGeom prst="rect">
+            <a:avLst/>
+          </a:prstGeom>
+        </p:spPr>
+      </p:pic>
+    </p:spTree>
+  </p:cSld>
+  <p:clrMapOvr>
+    <a:masterClrMapping/>
+  </p:clrMapOvr>
+  <mc:AlternateContent xmlns:mc="http://schemas.openxmlformats.org/markup-compatibility/2006">
+    <mc:Choice xmlns:p159="http://schemas.microsoft.com/office/powerpoint/2015/09/main" xmlns:p14="http://schemas.microsoft.com/office/powerpoint/2010/main" Requires="p159">
+      <p:transition p14:dur="2000" advClick="1"/>
+    </mc:Choice>
+    <mc:Fallback>
+      <p:transition advClick="1"/>
+    </mc:Fallback>
+  </mc:AlternateContent>
+</p:sld>
+</file>
+
+<file path=ppt/slides/slide6.xml><?xml version="1.0" encoding="utf-8"?>
+<p:sld xmlns:a="http://schemas.openxmlformats.org/drawingml/2006/main" xmlns:r="http://schemas.openxmlformats.org/officeDocument/2006/relationships" xmlns:p="http://schemas.openxmlformats.org/presentationml/2006/main" xmlns:m="http://schemas.openxmlformats.org/officeDocument/2006/math" xmlns:w="http://schemas.openxmlformats.org/wordprocessingml/2006/main" xmlns:mc="http://schemas.openxmlformats.org/markup-compatibility/2006" showMasterPhAnim="0" showMasterSp="1" show="1">
+  <p:cSld name="">
+    <p:spTree>
+      <p:nvGrpSpPr>
+        <p:cNvPr id="1" name=""/>
+        <p:cNvGrpSpPr/>
+        <p:nvPr/>
+      </p:nvGrpSpPr>
+      <p:grpSpPr bwMode="auto">
+        <a:xfrm>
+          <a:off x="0" y="0"/>
+          <a:ext cx="0" cy="0"/>
+          <a:chOff x="0" y="0"/>
+          <a:chExt cx="0" cy="0"/>
+        </a:xfrm>
+      </p:grpSpPr>
+      <p:pic>
+        <p:nvPicPr>
+          <p:cNvPr id="651888298" name=""/>
+          <p:cNvPicPr>
+            <a:picLocks noChangeAspect="1"/>
+          </p:cNvPicPr>
+          <p:nvPr/>
+        </p:nvPicPr>
+        <p:blipFill>
+          <a:blip r:embed="rId3"/>
+          <a:stretch/>
+        </p:blipFill>
+        <p:spPr bwMode="auto">
+          <a:xfrm>
+            <a:off x="209549" y="247649"/>
+            <a:ext cx="9486899" cy="4772025"/>
+          </a:xfrm>
+          <a:prstGeom prst="rect">
+            <a:avLst/>
+          </a:prstGeom>
+        </p:spPr>
+      </p:pic>
+      <p:pic>
+        <p:nvPicPr>
+          <p:cNvPr id="915616986" name=""/>
+          <p:cNvPicPr>
+            <a:picLocks noChangeAspect="1"/>
+          </p:cNvPicPr>
+          <p:nvPr/>
+        </p:nvPicPr>
+        <p:blipFill>
+          <a:blip r:embed="rId4"/>
+          <a:stretch/>
+        </p:blipFill>
+        <p:spPr bwMode="auto">
+          <a:xfrm flipH="0" flipV="0">
+            <a:off x="6000750" y="3429000"/>
+            <a:ext cx="5793149" cy="3004817"/>
+          </a:xfrm>
+          <a:prstGeom prst="rect">
+            <a:avLst/>
+          </a:prstGeom>
+        </p:spPr>
+      </p:pic>
+    </p:spTree>
+  </p:cSld>
+  <p:clrMapOvr>
+    <a:masterClrMapping/>
+  </p:clrMapOvr>
+  <mc:AlternateContent xmlns:mc="http://schemas.openxmlformats.org/markup-compatibility/2006">
+    <mc:Choice xmlns:p159="http://schemas.microsoft.com/office/powerpoint/2015/09/main" xmlns:p14="http://schemas.microsoft.com/office/powerpoint/2010/main" Requires="p159">
+      <p:transition p14:dur="2000" advClick="1"/>
+    </mc:Choice>
+    <mc:Fallback>
+      <p:transition advClick="1"/>
+    </mc:Fallback>
+  </mc:AlternateContent>
+</p:sld>
+</file>
+
+<file path=ppt/slides/slide7.xml><?xml version="1.0" encoding="utf-8"?>
+<p:sld xmlns:a="http://schemas.openxmlformats.org/drawingml/2006/main" xmlns:r="http://schemas.openxmlformats.org/officeDocument/2006/relationships" xmlns:p="http://schemas.openxmlformats.org/presentationml/2006/main" xmlns:m="http://schemas.openxmlformats.org/officeDocument/2006/math" xmlns:w="http://schemas.openxmlformats.org/wordprocessingml/2006/main" xmlns:mc="http://schemas.openxmlformats.org/markup-compatibility/2006" showMasterPhAnim="0" showMasterSp="1" show="1">
+  <p:cSld name="">
+    <p:spTree>
+      <p:nvGrpSpPr>
+        <p:cNvPr id="1" name=""/>
+        <p:cNvGrpSpPr/>
+        <p:nvPr/>
+      </p:nvGrpSpPr>
+      <p:grpSpPr bwMode="auto">
+        <a:xfrm>
+          <a:off x="0" y="0"/>
+          <a:ext cx="0" cy="0"/>
+          <a:chOff x="0" y="0"/>
+          <a:chExt cx="0" cy="0"/>
+        </a:xfrm>
+      </p:grpSpPr>
+      <p:pic>
+        <p:nvPicPr>
+          <p:cNvPr id="1576110808" name=""/>
+          <p:cNvPicPr>
+            <a:picLocks noChangeAspect="1"/>
+          </p:cNvPicPr>
+          <p:nvPr/>
+        </p:nvPicPr>
+        <p:blipFill>
+          <a:blip r:embed="rId3"/>
+          <a:stretch/>
+        </p:blipFill>
+        <p:spPr bwMode="auto">
+          <a:xfrm flipH="0" flipV="0">
+            <a:off x="-266699" y="-114299"/>
+            <a:ext cx="12141085" cy="6743700"/>
+          </a:xfrm>
+          <a:prstGeom prst="rect">
+            <a:avLst/>
+          </a:prstGeom>
+        </p:spPr>
+      </p:pic>
+    </p:spTree>
+  </p:cSld>
+  <p:clrMapOvr>
+    <a:masterClrMapping/>
+  </p:clrMapOvr>
+  <mc:AlternateContent xmlns:mc="http://schemas.openxmlformats.org/markup-compatibility/2006">
+    <mc:Choice xmlns:p159="http://schemas.microsoft.com/office/powerpoint/2015/09/main" xmlns:p14="http://schemas.microsoft.com/office/powerpoint/2010/main" Requires="p159">
+      <p:transition p14:dur="2000" advClick="1"/>
+    </mc:Choice>
+    <mc:Fallback>
+      <p:transition advClick="1"/>
+    </mc:Fallback>
+  </mc:AlternateContent>
+</p:sld>
+</file>
+
+<file path=ppt/slides/slide8.xml><?xml version="1.0" encoding="utf-8"?>
+<p:sld xmlns:a="http://schemas.openxmlformats.org/drawingml/2006/main" xmlns:r="http://schemas.openxmlformats.org/officeDocument/2006/relationships" xmlns:p="http://schemas.openxmlformats.org/presentationml/2006/main" xmlns:m="http://schemas.openxmlformats.org/officeDocument/2006/math" xmlns:w="http://schemas.openxmlformats.org/wordprocessingml/2006/main" xmlns:mc="http://schemas.openxmlformats.org/markup-compatibility/2006" showMasterPhAnim="0" showMasterSp="1" show="1">
+  <p:cSld name="">
+    <p:spTree>
+      <p:nvGrpSpPr>
+        <p:cNvPr id="1" name=""/>
+        <p:cNvGrpSpPr/>
+        <p:nvPr/>
+      </p:nvGrpSpPr>
+      <p:grpSpPr bwMode="auto">
+        <a:xfrm>
+          <a:off x="0" y="0"/>
+          <a:ext cx="0" cy="0"/>
+          <a:chOff x="0" y="0"/>
+          <a:chExt cx="0" cy="0"/>
+        </a:xfrm>
+      </p:grpSpPr>
+      <p:sp>
+        <p:nvSpPr>
+          <p:cNvPr id="1999335196" name="Title 1"/>
           <p:cNvSpPr>
             <a:spLocks noGrp="1"/>
           </p:cNvSpPr>
@@ -6038,7 +6438,11 @@
             </a:pPr>
             <a:r>
               <a:rPr sz="3200"/>
-              <a:t>Portfolio</a:t>
+              <a:t>Penilaian: </a:t>
+            </a:r>
+            <a:r>
+              <a:rPr sz="3200" i="1"/>
+              <a:t>peer evaluation</a:t>
             </a:r>
             <a:endParaRPr sz="3200"/>
           </a:p>
@@ -6046,7 +6450,7 @@
       </p:sp>
       <p:sp>
         <p:nvSpPr>
-          <p:cNvPr id="2118608497" name="Content Placeholder 2"/>
+          <p:cNvPr id="1766793986" name="Content Placeholder 2"/>
           <p:cNvSpPr>
             <a:spLocks noGrp="1"/>
           </p:cNvSpPr>
@@ -6054,12 +6458,7 @@
             <p:ph idx="1"/>
           </p:nvPr>
         </p:nvSpPr>
-        <p:spPr bwMode="auto">
-          <a:xfrm>
-            <a:off x="609597" y="1600200"/>
-            <a:ext cx="10972800" cy="4525960"/>
-          </a:xfrm>
-        </p:spPr>
+        <p:spPr bwMode="auto"/>
         <p:txBody>
           <a:bodyPr vertOverflow="overflow" horzOverflow="overflow" vert="horz" wrap="square" lIns="91440" tIns="45720" rIns="91440" bIns="45720" numCol="1" spcCol="0" rtlCol="0" fromWordArt="0" anchor="t" anchorCtr="0" forceAA="0" upright="0" compatLnSpc="0">
             <a:normAutofit/>
@@ -6070,7 +6469,7 @@
               <a:defRPr/>
             </a:pPr>
             <a:r>
-              <a:rPr sz="3200" b="0" i="0" u="none" strike="noStrike" cap="none" spc="0">
+              <a:rPr lang="en-US" sz="3200" b="0" i="0" u="none" strike="noStrike" cap="none" spc="0">
                 <a:solidFill>
                   <a:schemeClr val="tx1">
                     <a:lumMod val="75000"/>
@@ -6081,7 +6480,216 @@
                 <a:ea typeface="Arial"/>
                 <a:cs typeface="Arial"/>
               </a:rPr>
-              <a:t>Ditulis di python notebook</a:t>
+              <a:t>Kejujuran dan keapaadaan (baca keagaksedikittegaan)</a:t>
+            </a:r>
+            <a:endParaRPr lang="en-US" sz="3200" b="0" i="0" u="none" strike="noStrike" cap="none" spc="0">
+              <a:solidFill>
+                <a:schemeClr val="tx1">
+                  <a:lumMod val="75000"/>
+                  <a:lumOff val="25000"/>
+                </a:schemeClr>
+              </a:solidFill>
+              <a:latin typeface="Arial"/>
+              <a:ea typeface="Arial"/>
+              <a:cs typeface="Arial"/>
+            </a:endParaRPr>
+          </a:p>
+          <a:p>
+            <a:pPr>
+              <a:defRPr/>
+            </a:pPr>
+            <a:r>
+              <a:rPr lang="en-US" sz="3200" b="0" i="0" u="none" strike="noStrike" cap="none" spc="0">
+                <a:solidFill>
+                  <a:schemeClr val="tx1">
+                    <a:lumMod val="75000"/>
+                    <a:lumOff val="25000"/>
+                  </a:schemeClr>
+                </a:solidFill>
+                <a:latin typeface="Arial"/>
+                <a:ea typeface="Arial"/>
+                <a:cs typeface="Arial"/>
+              </a:rPr>
+              <a:t>Reflektif: seharusnya mudah dipahami sesama</a:t>
+            </a:r>
+            <a:endParaRPr lang="en-US" sz="3200" b="0" i="0" u="none" strike="noStrike" cap="none" spc="0">
+              <a:solidFill>
+                <a:schemeClr val="tx1">
+                  <a:lumMod val="75000"/>
+                  <a:lumOff val="25000"/>
+                </a:schemeClr>
+              </a:solidFill>
+              <a:latin typeface="Arial"/>
+              <a:ea typeface="Arial"/>
+              <a:cs typeface="Arial"/>
+            </a:endParaRPr>
+          </a:p>
+          <a:p>
+            <a:pPr>
+              <a:defRPr/>
+            </a:pPr>
+            <a:r>
+              <a:rPr lang="en-US" sz="3200" b="0" i="0" u="none" strike="noStrike" cap="none" spc="0">
+                <a:solidFill>
+                  <a:schemeClr val="tx1">
+                    <a:lumMod val="75000"/>
+                    <a:lumOff val="25000"/>
+                  </a:schemeClr>
+                </a:solidFill>
+                <a:latin typeface="Arial"/>
+                <a:ea typeface="Arial"/>
+                <a:cs typeface="Arial"/>
+              </a:rPr>
+              <a:t>Empati: komentar/kritik konstruktif</a:t>
+            </a:r>
+            <a:endParaRPr lang="en-US" sz="3200" b="0" i="0" u="none" strike="noStrike" cap="none" spc="0">
+              <a:solidFill>
+                <a:schemeClr val="tx1">
+                  <a:lumMod val="75000"/>
+                  <a:lumOff val="25000"/>
+                </a:schemeClr>
+              </a:solidFill>
+              <a:latin typeface="Arial"/>
+              <a:ea typeface="Arial"/>
+              <a:cs typeface="Arial"/>
+            </a:endParaRPr>
+          </a:p>
+          <a:p>
+            <a:pPr>
+              <a:defRPr/>
+            </a:pPr>
+            <a:endParaRPr lang="en-US" sz="3200" b="0" i="0" u="none" strike="noStrike" cap="none" spc="0">
+              <a:solidFill>
+                <a:schemeClr val="tx1">
+                  <a:lumMod val="75000"/>
+                  <a:lumOff val="25000"/>
+                </a:schemeClr>
+              </a:solidFill>
+              <a:latin typeface="Arial"/>
+              <a:ea typeface="Arial"/>
+              <a:cs typeface="Arial"/>
+            </a:endParaRPr>
+          </a:p>
+          <a:p>
+            <a:pPr>
+              <a:defRPr/>
+            </a:pPr>
+            <a:r>
+              <a:rPr lang="en-US" sz="3200" b="0" i="0" u="none" strike="noStrike" cap="none" spc="0">
+                <a:solidFill>
+                  <a:schemeClr val="tx1">
+                    <a:lumMod val="75000"/>
+                    <a:lumOff val="25000"/>
+                  </a:schemeClr>
+                </a:solidFill>
+                <a:latin typeface="Arial"/>
+                <a:ea typeface="Arial"/>
+                <a:cs typeface="Arial"/>
+              </a:rPr>
+              <a:t>Skala 1-7 (2x) untuk 5V yang pertama (70%)</a:t>
+            </a:r>
+            <a:endParaRPr lang="en-US" sz="3200" b="0" i="0" u="none" strike="noStrike" cap="none" spc="0">
+              <a:solidFill>
+                <a:schemeClr val="tx1">
+                  <a:lumMod val="75000"/>
+                  <a:lumOff val="25000"/>
+                </a:schemeClr>
+              </a:solidFill>
+              <a:latin typeface="Arial"/>
+              <a:ea typeface="Arial"/>
+              <a:cs typeface="Arial"/>
+            </a:endParaRPr>
+          </a:p>
+          <a:p>
+            <a:pPr>
+              <a:defRPr/>
+            </a:pPr>
+            <a:r>
+              <a:rPr lang="en-US" sz="3200" b="0" i="0" u="none" strike="noStrike" cap="none" spc="0">
+                <a:solidFill>
+                  <a:schemeClr val="tx1">
+                    <a:lumMod val="75000"/>
+                    <a:lumOff val="25000"/>
+                  </a:schemeClr>
+                </a:solidFill>
+                <a:latin typeface="Arial"/>
+                <a:ea typeface="Arial"/>
+                <a:cs typeface="Arial"/>
+              </a:rPr>
+              <a:t>Seberapa urgen masalah yang diangkat (10%)</a:t>
+            </a:r>
+            <a:endParaRPr lang="en-US" sz="3200" b="0" i="0" u="none" strike="noStrike" cap="none" spc="0">
+              <a:solidFill>
+                <a:schemeClr val="tx1">
+                  <a:lumMod val="75000"/>
+                  <a:lumOff val="25000"/>
+                </a:schemeClr>
+              </a:solidFill>
+              <a:latin typeface="Arial"/>
+              <a:ea typeface="Arial"/>
+              <a:cs typeface="Arial"/>
+            </a:endParaRPr>
+          </a:p>
+          <a:p>
+            <a:pPr>
+              <a:defRPr/>
+            </a:pPr>
+            <a:r>
+              <a:rPr lang="en-US" sz="3200" b="0" i="0" u="none" strike="noStrike" cap="none" spc="0">
+                <a:solidFill>
+                  <a:schemeClr val="tx1">
+                    <a:lumMod val="75000"/>
+                    <a:lumOff val="25000"/>
+                  </a:schemeClr>
+                </a:solidFill>
+                <a:latin typeface="Arial"/>
+                <a:ea typeface="Arial"/>
+                <a:cs typeface="Arial"/>
+              </a:rPr>
+              <a:t>Seberapa presentasi mudah dipahami (10+10%)</a:t>
+            </a:r>
+            <a:r>
+              <a:rPr lang="en-US" sz="3200" b="0" i="0" u="none" strike="noStrike" cap="none" spc="0">
+                <a:solidFill>
+                  <a:schemeClr val="tx1">
+                    <a:lumMod val="75000"/>
+                    <a:lumOff val="25000"/>
+                  </a:schemeClr>
+                </a:solidFill>
+                <a:latin typeface="Arial"/>
+                <a:ea typeface="Arial"/>
+                <a:cs typeface="Arial"/>
+              </a:rPr>
+              <a:t>*</a:t>
+            </a:r>
+            <a:endParaRPr lang="en-US" sz="3200" b="0" i="0" u="none" strike="noStrike" cap="none" spc="0">
+              <a:solidFill>
+                <a:schemeClr val="tx1">
+                  <a:lumMod val="75000"/>
+                  <a:lumOff val="25000"/>
+                </a:schemeClr>
+              </a:solidFill>
+              <a:latin typeface="Times New Roman"/>
+              <a:cs typeface="Times New Roman"/>
+            </a:endParaRPr>
+          </a:p>
+          <a:p>
+            <a:pPr>
+              <a:defRPr/>
+            </a:pPr>
+            <a:r>
+              <a:rPr lang="en-US" sz="3200" b="0" i="0" u="none" strike="noStrike" cap="none" spc="0">
+                <a:solidFill>
+                  <a:schemeClr val="tx1">
+                    <a:lumMod val="75000"/>
+                    <a:lumOff val="25000"/>
+                  </a:schemeClr>
+                </a:solidFill>
+                <a:latin typeface="Arial"/>
+                <a:ea typeface="Arial"/>
+                <a:cs typeface="Arial"/>
+              </a:rPr>
+              <a:t>+1 untuk masing-masing komentar/tanya jawab (maks 5)</a:t>
             </a:r>
             <a:endParaRPr sz="3200" b="0" i="0" u="none" strike="noStrike" cap="none" spc="0">
               <a:solidFill>
@@ -6099,109 +6707,7 @@
             <a:pPr>
               <a:defRPr/>
             </a:pPr>
-            <a:r>
-              <a:rPr sz="3200" b="0" i="0" u="none" strike="noStrike" cap="none" spc="0">
-                <a:solidFill>
-                  <a:schemeClr val="tx1">
-                    <a:lumMod val="75000"/>
-                    <a:lumOff val="25000"/>
-                  </a:schemeClr>
-                </a:solidFill>
-                <a:latin typeface="Arial"/>
-                <a:ea typeface="Arial"/>
-                <a:cs typeface="Arial"/>
-              </a:rPr>
-              <a:t>Upload di </a:t>
-            </a:r>
-            <a:r>
-              <a:rPr sz="3200" b="1" i="0" u="none" strike="noStrike" cap="none" spc="0">
-                <a:solidFill>
-                  <a:schemeClr val="tx1">
-                    <a:lumMod val="75000"/>
-                    <a:lumOff val="25000"/>
-                  </a:schemeClr>
-                </a:solidFill>
-                <a:latin typeface="Arial"/>
-                <a:ea typeface="Arial"/>
-                <a:cs typeface="Arial"/>
-              </a:rPr>
-              <a:t>github</a:t>
-            </a:r>
-            <a:endParaRPr sz="3200" b="0" i="0" u="none" strike="noStrike" cap="none" spc="0">
-              <a:solidFill>
-                <a:schemeClr val="tx1">
-                  <a:lumMod val="75000"/>
-                  <a:lumOff val="25000"/>
-                </a:schemeClr>
-              </a:solidFill>
-              <a:latin typeface="Arial"/>
-              <a:ea typeface="Arial"/>
-              <a:cs typeface="Arial"/>
-            </a:endParaRPr>
-          </a:p>
-          <a:p>
-            <a:pPr>
-              <a:defRPr/>
-            </a:pPr>
-            <a:r>
-              <a:rPr sz="3200" b="0" i="0" u="none" strike="noStrike" cap="none" spc="0">
-                <a:solidFill>
-                  <a:schemeClr val="tx1">
-                    <a:lumMod val="75000"/>
-                    <a:lumOff val="25000"/>
-                  </a:schemeClr>
-                </a:solidFill>
-                <a:latin typeface="Arial"/>
-                <a:ea typeface="Arial"/>
-                <a:cs typeface="Arial"/>
-              </a:rPr>
-              <a:t>Mohon diupdate commit secara berkala, kalau bisa oleh anggota kelompok yang berbeda sesuai pembagian job desc </a:t>
-            </a:r>
-            <a:r>
-              <a:rPr sz="3200" b="0" i="0" u="none" strike="noStrike" cap="none" spc="0">
-                <a:solidFill>
-                  <a:schemeClr val="tx1">
-                    <a:lumMod val="75000"/>
-                    <a:lumOff val="25000"/>
-                  </a:schemeClr>
-                </a:solidFill>
-                <a:latin typeface="Arial"/>
-                <a:ea typeface="Arial"/>
-                <a:cs typeface="Arial"/>
-              </a:rPr>
-              <a:t>(atau kesenggangan)</a:t>
-            </a:r>
-            <a:endParaRPr sz="3200" b="0" i="0" u="none" strike="noStrike" cap="none" spc="0">
-              <a:solidFill>
-                <a:schemeClr val="tx1">
-                  <a:lumMod val="75000"/>
-                  <a:lumOff val="25000"/>
-                </a:schemeClr>
-              </a:solidFill>
-              <a:latin typeface="Arial"/>
-              <a:ea typeface="Arial"/>
-              <a:cs typeface="Arial"/>
-            </a:endParaRPr>
-          </a:p>
-          <a:p>
-            <a:pPr>
-              <a:defRPr/>
-            </a:pPr>
-            <a:r>
-              <a:rPr sz="3200" b="0" i="0" u="none" strike="noStrike" cap="none" spc="0">
-                <a:solidFill>
-                  <a:schemeClr val="tx1">
-                    <a:lumMod val="75000"/>
-                    <a:lumOff val="25000"/>
-                  </a:schemeClr>
-                </a:solidFill>
-                <a:latin typeface="Arial"/>
-                <a:ea typeface="Arial"/>
-                <a:cs typeface="Arial"/>
-              </a:rPr>
-              <a:t>File-file terkait yang sekiranya ukurannya masih ‘praktis’ diupload ke github (CSV, gambar grafik, PDF/PPT hasil diskusi, etc) juga mohon diupload</a:t>
-            </a:r>
-            <a:endParaRPr sz="3200" b="0" i="0" u="none" strike="noStrike" cap="none" spc="0">
+            <a:endParaRPr lang="en-US" sz="3200" b="0" i="0" u="none" strike="noStrike" cap="none" spc="0">
               <a:solidFill>
                 <a:schemeClr val="tx1">
                   <a:lumMod val="75000"/>

--- a/rubrikETS.pptx
+++ b/rubrikETS.pptx
@@ -141,7 +141,7 @@
       </p:grpSpPr>
       <p:sp>
         <p:nvSpPr>
-          <p:cNvPr id="94901275" name="Header Placeholder 1"/>
+          <p:cNvPr id="188538997" name="Header Placeholder 1"/>
           <p:cNvSpPr>
             <a:spLocks noGrp="1"/>
           </p:cNvSpPr>
@@ -175,7 +175,7 @@
       </p:sp>
       <p:sp>
         <p:nvSpPr>
-          <p:cNvPr id="1249202975" name="Date Placeholder 2"/>
+          <p:cNvPr id="283794699" name="Date Placeholder 2"/>
           <p:cNvSpPr>
             <a:spLocks noGrp="1"/>
           </p:cNvSpPr>
@@ -213,7 +213,7 @@
       </p:sp>
       <p:sp>
         <p:nvSpPr>
-          <p:cNvPr id="711969050" name="Slide Image Placeholder 3"/>
+          <p:cNvPr id="1609653427" name="Slide Image Placeholder 3"/>
           <p:cNvSpPr>
             <a:spLocks noChangeAspect="1" noGrp="1" noRot="1"/>
           </p:cNvSpPr>
@@ -249,7 +249,7 @@
       </p:sp>
       <p:sp>
         <p:nvSpPr>
-          <p:cNvPr id="1210642693" name="Notes Placeholder 4"/>
+          <p:cNvPr id="1969107531" name="Notes Placeholder 4"/>
           <p:cNvSpPr>
             <a:spLocks noGrp="1"/>
           </p:cNvSpPr>
@@ -323,7 +323,7 @@
       </p:sp>
       <p:sp>
         <p:nvSpPr>
-          <p:cNvPr id="11869857" name="Footer Placeholder 5"/>
+          <p:cNvPr id="1614509468" name="Footer Placeholder 5"/>
           <p:cNvSpPr>
             <a:spLocks noGrp="1"/>
           </p:cNvSpPr>
@@ -357,7 +357,7 @@
       </p:sp>
       <p:sp>
         <p:nvSpPr>
-          <p:cNvPr id="180546306" name="Slide Number Placeholder 6"/>
+          <p:cNvPr id="1458006703" name="Slide Number Placeholder 6"/>
           <p:cNvSpPr>
             <a:spLocks noGrp="1"/>
           </p:cNvSpPr>
@@ -510,7 +510,7 @@
       </p:grpSpPr>
       <p:sp>
         <p:nvSpPr>
-          <p:cNvPr id="1992624308" name="Slide Image Placeholder 1"/>
+          <p:cNvPr id="1935007317" name="Slide Image Placeholder 1"/>
           <p:cNvSpPr>
             <a:spLocks noChangeAspect="1" noGrp="1" noRot="1"/>
           </p:cNvSpPr>
@@ -527,7 +527,7 @@
       </p:sp>
       <p:sp>
         <p:nvSpPr>
-          <p:cNvPr id="265049942" name="Notes Placeholder 2"/>
+          <p:cNvPr id="566465449" name="Notes Placeholder 2"/>
           <p:cNvSpPr>
             <a:spLocks noGrp="1"/>
           </p:cNvSpPr>
@@ -552,7 +552,7 @@
       </p:sp>
       <p:sp>
         <p:nvSpPr>
-          <p:cNvPr id="82197310" name="Slide Number Placeholder 3"/>
+          <p:cNvPr id="1934909019" name="Slide Number Placeholder 3"/>
           <p:cNvSpPr>
             <a:spLocks noGrp="1"/>
           </p:cNvSpPr>
@@ -603,7 +603,7 @@
       </p:grpSpPr>
       <p:sp>
         <p:nvSpPr>
-          <p:cNvPr id="1222881398" name="Slide Image Placeholder 1"/>
+          <p:cNvPr id="55974911" name="Slide Image Placeholder 1"/>
           <p:cNvSpPr>
             <a:spLocks noChangeAspect="1" noGrp="1" noRot="1"/>
           </p:cNvSpPr>
@@ -615,7 +615,7 @@
       </p:sp>
       <p:sp>
         <p:nvSpPr>
-          <p:cNvPr id="29857699" name="Notes Placeholder 2"/>
+          <p:cNvPr id="171561693" name="Notes Placeholder 2"/>
           <p:cNvSpPr>
             <a:spLocks noGrp="1"/>
           </p:cNvSpPr>
@@ -637,7 +637,7 @@
       </p:sp>
       <p:sp>
         <p:nvSpPr>
-          <p:cNvPr id="1047651387" name="Slide Number Placeholder 3"/>
+          <p:cNvPr id="389327349" name="Slide Number Placeholder 3"/>
           <p:cNvSpPr>
             <a:spLocks noGrp="1"/>
           </p:cNvSpPr>
@@ -688,7 +688,7 @@
       </p:grpSpPr>
       <p:sp>
         <p:nvSpPr>
-          <p:cNvPr id="706624908" name="Slide Image Placeholder 1"/>
+          <p:cNvPr id="1704940093" name="Slide Image Placeholder 1"/>
           <p:cNvSpPr>
             <a:spLocks noChangeAspect="1" noGrp="1" noRot="1"/>
           </p:cNvSpPr>
@@ -700,7 +700,7 @@
       </p:sp>
       <p:sp>
         <p:nvSpPr>
-          <p:cNvPr id="1160298163" name="Notes Placeholder 2"/>
+          <p:cNvPr id="704869399" name="Notes Placeholder 2"/>
           <p:cNvSpPr>
             <a:spLocks noGrp="1"/>
           </p:cNvSpPr>
@@ -722,7 +722,7 @@
       </p:sp>
       <p:sp>
         <p:nvSpPr>
-          <p:cNvPr id="2141883703" name="Slide Number Placeholder 3"/>
+          <p:cNvPr id="1935178033" name="Slide Number Placeholder 3"/>
           <p:cNvSpPr>
             <a:spLocks noGrp="1"/>
           </p:cNvSpPr>
@@ -773,7 +773,7 @@
       </p:grpSpPr>
       <p:sp>
         <p:nvSpPr>
-          <p:cNvPr id="121435091" name="Slide Image Placeholder 1"/>
+          <p:cNvPr id="1361158008" name="Slide Image Placeholder 1"/>
           <p:cNvSpPr>
             <a:spLocks noChangeAspect="1" noGrp="1" noRot="1"/>
           </p:cNvSpPr>
@@ -785,7 +785,7 @@
       </p:sp>
       <p:sp>
         <p:nvSpPr>
-          <p:cNvPr id="145884490" name="Notes Placeholder 2"/>
+          <p:cNvPr id="2116281625" name="Notes Placeholder 2"/>
           <p:cNvSpPr>
             <a:spLocks noGrp="1"/>
           </p:cNvSpPr>
@@ -807,7 +807,7 @@
       </p:sp>
       <p:sp>
         <p:nvSpPr>
-          <p:cNvPr id="1881100436" name="Slide Number Placeholder 3"/>
+          <p:cNvPr id="199155423" name="Slide Number Placeholder 3"/>
           <p:cNvSpPr>
             <a:spLocks noGrp="1"/>
           </p:cNvSpPr>
@@ -858,7 +858,7 @@
       </p:grpSpPr>
       <p:sp>
         <p:nvSpPr>
-          <p:cNvPr id="1432097629" name="Slide Image Placeholder 1"/>
+          <p:cNvPr id="1979804486" name="Slide Image Placeholder 1"/>
           <p:cNvSpPr>
             <a:spLocks noChangeAspect="1" noGrp="1" noRot="1"/>
           </p:cNvSpPr>
@@ -870,7 +870,7 @@
       </p:sp>
       <p:sp>
         <p:nvSpPr>
-          <p:cNvPr id="379373038" name="Notes Placeholder 2"/>
+          <p:cNvPr id="468662442" name="Notes Placeholder 2"/>
           <p:cNvSpPr>
             <a:spLocks noGrp="1"/>
           </p:cNvSpPr>
@@ -892,7 +892,7 @@
       </p:sp>
       <p:sp>
         <p:nvSpPr>
-          <p:cNvPr id="1391296464" name="Slide Number Placeholder 3"/>
+          <p:cNvPr id="1339671381" name="Slide Number Placeholder 3"/>
           <p:cNvSpPr>
             <a:spLocks noGrp="1"/>
           </p:cNvSpPr>
@@ -943,7 +943,7 @@
       </p:grpSpPr>
       <p:sp>
         <p:nvSpPr>
-          <p:cNvPr id="1244645747" name="Slide Image Placeholder 1"/>
+          <p:cNvPr id="1253397196" name="Slide Image Placeholder 1"/>
           <p:cNvSpPr>
             <a:spLocks noChangeAspect="1" noGrp="1" noRot="1"/>
           </p:cNvSpPr>
@@ -955,7 +955,7 @@
       </p:sp>
       <p:sp>
         <p:nvSpPr>
-          <p:cNvPr id="1545397774" name="Notes Placeholder 2"/>
+          <p:cNvPr id="1803826488" name="Notes Placeholder 2"/>
           <p:cNvSpPr>
             <a:spLocks noGrp="1"/>
           </p:cNvSpPr>
@@ -977,7 +977,7 @@
       </p:sp>
       <p:sp>
         <p:nvSpPr>
-          <p:cNvPr id="1461658771" name="Slide Number Placeholder 3"/>
+          <p:cNvPr id="859798717" name="Slide Number Placeholder 3"/>
           <p:cNvSpPr>
             <a:spLocks noGrp="1"/>
           </p:cNvSpPr>
@@ -1028,7 +1028,7 @@
       </p:grpSpPr>
       <p:sp>
         <p:nvSpPr>
-          <p:cNvPr id="1394545204" name="Slide Image Placeholder 1"/>
+          <p:cNvPr id="1893444442" name="Slide Image Placeholder 1"/>
           <p:cNvSpPr>
             <a:spLocks noChangeAspect="1" noGrp="1" noRot="1"/>
           </p:cNvSpPr>
@@ -1040,7 +1040,7 @@
       </p:sp>
       <p:sp>
         <p:nvSpPr>
-          <p:cNvPr id="802865947" name="Notes Placeholder 2"/>
+          <p:cNvPr id="225789367" name="Notes Placeholder 2"/>
           <p:cNvSpPr>
             <a:spLocks noGrp="1"/>
           </p:cNvSpPr>
@@ -1062,7 +1062,7 @@
       </p:sp>
       <p:sp>
         <p:nvSpPr>
-          <p:cNvPr id="1318428950" name="Slide Number Placeholder 3"/>
+          <p:cNvPr id="61852400" name="Slide Number Placeholder 3"/>
           <p:cNvSpPr>
             <a:spLocks noGrp="1"/>
           </p:cNvSpPr>
@@ -1113,7 +1113,7 @@
       </p:grpSpPr>
       <p:sp>
         <p:nvSpPr>
-          <p:cNvPr id="270945092" name="Slide Image Placeholder 1"/>
+          <p:cNvPr id="1827987300" name="Slide Image Placeholder 1"/>
           <p:cNvSpPr>
             <a:spLocks noChangeAspect="1" noGrp="1" noRot="1"/>
           </p:cNvSpPr>
@@ -1125,7 +1125,7 @@
       </p:sp>
       <p:sp>
         <p:nvSpPr>
-          <p:cNvPr id="505956634" name="Notes Placeholder 2"/>
+          <p:cNvPr id="1706801608" name="Notes Placeholder 2"/>
           <p:cNvSpPr>
             <a:spLocks noGrp="1"/>
           </p:cNvSpPr>
@@ -1147,7 +1147,7 @@
       </p:sp>
       <p:sp>
         <p:nvSpPr>
-          <p:cNvPr id="1352118178" name="Slide Number Placeholder 3"/>
+          <p:cNvPr id="928355751" name="Slide Number Placeholder 3"/>
           <p:cNvSpPr>
             <a:spLocks noGrp="1"/>
           </p:cNvSpPr>
@@ -1198,7 +1198,7 @@
       </p:grpSpPr>
       <p:sp>
         <p:nvSpPr>
-          <p:cNvPr id="84610531" name="Shape 1059"/>
+          <p:cNvPr id="417396993" name="Shape 1059"/>
           <p:cNvSpPr>
             <a:spLocks noChangeArrowheads="1" noGrp="1"/>
           </p:cNvSpPr>
@@ -1321,7 +1321,7 @@
       </p:sp>
       <p:sp>
         <p:nvSpPr>
-          <p:cNvPr id="901723592" name="Shape 1060"/>
+          <p:cNvPr id="978389618" name="Shape 1060"/>
           <p:cNvSpPr>
             <a:spLocks noChangeArrowheads="1" noGrp="1"/>
           </p:cNvSpPr>
@@ -1412,7 +1412,7 @@
       </p:sp>
       <p:sp>
         <p:nvSpPr>
-          <p:cNvPr id="2016962568" name="Shape 1061"/>
+          <p:cNvPr id="1426958506" name="Shape 1061"/>
           <p:cNvSpPr>
             <a:spLocks noChangeArrowheads="1" noGrp="1"/>
           </p:cNvSpPr>
@@ -1498,7 +1498,7 @@
       </p:sp>
       <p:sp>
         <p:nvSpPr>
-          <p:cNvPr id="234492519" name="Shape 1062"/>
+          <p:cNvPr id="1133383384" name="Shape 1062"/>
           <p:cNvSpPr>
             <a:spLocks noChangeArrowheads="1" noGrp="1"/>
           </p:cNvSpPr>
@@ -1576,7 +1576,7 @@
       </p:sp>
       <p:sp>
         <p:nvSpPr>
-          <p:cNvPr id="1402196417" name="Shape 1063"/>
+          <p:cNvPr id="1064800638" name="Shape 1063"/>
           <p:cNvSpPr>
             <a:spLocks noChangeArrowheads="1" noGrp="1"/>
           </p:cNvSpPr>
@@ -1654,7 +1654,7 @@
       </p:sp>
       <p:sp>
         <p:nvSpPr>
-          <p:cNvPr id="314818968" name="Subtitle 2"/>
+          <p:cNvPr id="61600099" name="Subtitle 2"/>
           <p:cNvSpPr>
             <a:spLocks noGrp="1"/>
           </p:cNvSpPr>
@@ -1777,7 +1777,7 @@
       </p:sp>
       <p:sp>
         <p:nvSpPr>
-          <p:cNvPr id="161225824" name="Date Placeholder 3"/>
+          <p:cNvPr id="1667652134" name="Date Placeholder 3"/>
           <p:cNvSpPr>
             <a:spLocks noGrp="1"/>
           </p:cNvSpPr>
@@ -1803,7 +1803,7 @@
       </p:sp>
       <p:sp>
         <p:nvSpPr>
-          <p:cNvPr id="854724660" name="Footer Placeholder 4"/>
+          <p:cNvPr id="798566830" name="Footer Placeholder 4"/>
           <p:cNvSpPr>
             <a:spLocks noGrp="1"/>
           </p:cNvSpPr>
@@ -1825,7 +1825,7 @@
       </p:sp>
       <p:sp>
         <p:nvSpPr>
-          <p:cNvPr id="1027550752" name="Slide Number Placeholder 5"/>
+          <p:cNvPr id="311572081" name="Slide Number Placeholder 5"/>
           <p:cNvSpPr>
             <a:spLocks noGrp="1"/>
           </p:cNvSpPr>
@@ -1851,7 +1851,7 @@
       </p:sp>
       <p:sp>
         <p:nvSpPr>
-          <p:cNvPr id="138303879" name="Title 6"/>
+          <p:cNvPr id="711966018" name="Title 6"/>
           <p:cNvSpPr>
             <a:spLocks noGrp="1"/>
           </p:cNvSpPr>
@@ -1911,7 +1911,7 @@
       </p:grpSpPr>
       <p:sp>
         <p:nvSpPr>
-          <p:cNvPr id="1173112230" name="Title 1"/>
+          <p:cNvPr id="298514161" name="Title 1"/>
           <p:cNvSpPr>
             <a:spLocks noGrp="1"/>
           </p:cNvSpPr>
@@ -1937,7 +1937,7 @@
       </p:sp>
       <p:sp>
         <p:nvSpPr>
-          <p:cNvPr id="1934272057" name="Vertical Text Placeholder 2"/>
+          <p:cNvPr id="1232676987" name="Vertical Text Placeholder 2"/>
           <p:cNvSpPr>
             <a:spLocks noGrp="1"/>
           </p:cNvSpPr>
@@ -2003,7 +2003,7 @@
       </p:sp>
       <p:sp>
         <p:nvSpPr>
-          <p:cNvPr id="1978549232" name="Date Placeholder 3"/>
+          <p:cNvPr id="1843067494" name="Date Placeholder 3"/>
           <p:cNvSpPr>
             <a:spLocks noGrp="1"/>
           </p:cNvSpPr>
@@ -2029,7 +2029,7 @@
       </p:sp>
       <p:sp>
         <p:nvSpPr>
-          <p:cNvPr id="158781516" name="Footer Placeholder 4"/>
+          <p:cNvPr id="1784807401" name="Footer Placeholder 4"/>
           <p:cNvSpPr>
             <a:spLocks noGrp="1"/>
           </p:cNvSpPr>
@@ -2051,7 +2051,7 @@
       </p:sp>
       <p:sp>
         <p:nvSpPr>
-          <p:cNvPr id="894720439" name="Slide Number Placeholder 5"/>
+          <p:cNvPr id="2003243039" name="Slide Number Placeholder 5"/>
           <p:cNvSpPr>
             <a:spLocks noGrp="1"/>
           </p:cNvSpPr>
@@ -2102,7 +2102,7 @@
       </p:grpSpPr>
       <p:sp>
         <p:nvSpPr>
-          <p:cNvPr id="1372393624" name="Vertical Title 1"/>
+          <p:cNvPr id="893844139" name="Vertical Title 1"/>
           <p:cNvSpPr>
             <a:spLocks noGrp="1"/>
           </p:cNvSpPr>
@@ -2137,7 +2137,7 @@
       </p:sp>
       <p:sp>
         <p:nvSpPr>
-          <p:cNvPr id="1150805579" name="Vertical Text Placeholder 2"/>
+          <p:cNvPr id="1077319282" name="Vertical Text Placeholder 2"/>
           <p:cNvSpPr>
             <a:spLocks noGrp="1"/>
           </p:cNvSpPr>
@@ -2208,7 +2208,7 @@
       </p:sp>
       <p:sp>
         <p:nvSpPr>
-          <p:cNvPr id="244530018" name="Date Placeholder 3"/>
+          <p:cNvPr id="414112602" name="Date Placeholder 3"/>
           <p:cNvSpPr>
             <a:spLocks noGrp="1"/>
           </p:cNvSpPr>
@@ -2234,7 +2234,7 @@
       </p:sp>
       <p:sp>
         <p:nvSpPr>
-          <p:cNvPr id="844334437" name="Footer Placeholder 4"/>
+          <p:cNvPr id="88229974" name="Footer Placeholder 4"/>
           <p:cNvSpPr>
             <a:spLocks noGrp="1"/>
           </p:cNvSpPr>
@@ -2256,7 +2256,7 @@
       </p:sp>
       <p:sp>
         <p:nvSpPr>
-          <p:cNvPr id="566969059" name="Slide Number Placeholder 5"/>
+          <p:cNvPr id="1857243497" name="Slide Number Placeholder 5"/>
           <p:cNvSpPr>
             <a:spLocks noGrp="1"/>
           </p:cNvSpPr>
@@ -2307,7 +2307,7 @@
       </p:grpSpPr>
       <p:sp>
         <p:nvSpPr>
-          <p:cNvPr id="2141949683" name="Title 1"/>
+          <p:cNvPr id="1549875813" name="Title 1"/>
           <p:cNvSpPr>
             <a:spLocks noGrp="1"/>
           </p:cNvSpPr>
@@ -2333,7 +2333,7 @@
       </p:sp>
       <p:sp>
         <p:nvSpPr>
-          <p:cNvPr id="56889696" name="Content Placeholder 2"/>
+          <p:cNvPr id="2085994951" name="Content Placeholder 2"/>
           <p:cNvSpPr>
             <a:spLocks noGrp="1"/>
           </p:cNvSpPr>
@@ -2399,7 +2399,7 @@
       </p:sp>
       <p:sp>
         <p:nvSpPr>
-          <p:cNvPr id="649544214" name="Date Placeholder 3"/>
+          <p:cNvPr id="382801725" name="Date Placeholder 3"/>
           <p:cNvSpPr>
             <a:spLocks noGrp="1"/>
           </p:cNvSpPr>
@@ -2425,7 +2425,7 @@
       </p:sp>
       <p:sp>
         <p:nvSpPr>
-          <p:cNvPr id="141471638" name="Footer Placeholder 4"/>
+          <p:cNvPr id="246179888" name="Footer Placeholder 4"/>
           <p:cNvSpPr>
             <a:spLocks noGrp="1"/>
           </p:cNvSpPr>
@@ -2447,7 +2447,7 @@
       </p:sp>
       <p:sp>
         <p:nvSpPr>
-          <p:cNvPr id="920856246" name="Slide Number Placeholder 5"/>
+          <p:cNvPr id="543656543" name="Slide Number Placeholder 5"/>
           <p:cNvSpPr>
             <a:spLocks noGrp="1"/>
           </p:cNvSpPr>
@@ -2498,7 +2498,7 @@
       </p:grpSpPr>
       <p:sp>
         <p:nvSpPr>
-          <p:cNvPr id="1111082098" name="Title 1"/>
+          <p:cNvPr id="242090428" name="Title 1"/>
           <p:cNvSpPr>
             <a:spLocks noGrp="1"/>
           </p:cNvSpPr>
@@ -2533,7 +2533,7 @@
       </p:sp>
       <p:sp>
         <p:nvSpPr>
-          <p:cNvPr id="1025625018" name="Text Placeholder 2"/>
+          <p:cNvPr id="68192721" name="Text Placeholder 2"/>
           <p:cNvSpPr>
             <a:spLocks noGrp="1"/>
           </p:cNvSpPr>
@@ -2655,7 +2655,7 @@
       </p:sp>
       <p:sp>
         <p:nvSpPr>
-          <p:cNvPr id="456380698" name="Date Placeholder 3"/>
+          <p:cNvPr id="260701519" name="Date Placeholder 3"/>
           <p:cNvSpPr>
             <a:spLocks noGrp="1"/>
           </p:cNvSpPr>
@@ -2681,7 +2681,7 @@
       </p:sp>
       <p:sp>
         <p:nvSpPr>
-          <p:cNvPr id="996384650" name="Footer Placeholder 4"/>
+          <p:cNvPr id="1003634035" name="Footer Placeholder 4"/>
           <p:cNvSpPr>
             <a:spLocks noGrp="1"/>
           </p:cNvSpPr>
@@ -2703,7 +2703,7 @@
       </p:sp>
       <p:sp>
         <p:nvSpPr>
-          <p:cNvPr id="983677052" name="Slide Number Placeholder 5"/>
+          <p:cNvPr id="1602247440" name="Slide Number Placeholder 5"/>
           <p:cNvSpPr>
             <a:spLocks noGrp="1"/>
           </p:cNvSpPr>
@@ -2754,7 +2754,7 @@
       </p:grpSpPr>
       <p:sp>
         <p:nvSpPr>
-          <p:cNvPr id="1230250356" name="Title 1"/>
+          <p:cNvPr id="475545105" name="Title 1"/>
           <p:cNvSpPr>
             <a:spLocks noGrp="1"/>
           </p:cNvSpPr>
@@ -2780,7 +2780,7 @@
       </p:sp>
       <p:sp>
         <p:nvSpPr>
-          <p:cNvPr id="1291777511" name="Content Placeholder 2"/>
+          <p:cNvPr id="1953193207" name="Content Placeholder 2"/>
           <p:cNvSpPr>
             <a:spLocks noGrp="1"/>
           </p:cNvSpPr>
@@ -2879,7 +2879,7 @@
       </p:sp>
       <p:sp>
         <p:nvSpPr>
-          <p:cNvPr id="43770311" name="Content Placeholder 3"/>
+          <p:cNvPr id="1996526997" name="Content Placeholder 3"/>
           <p:cNvSpPr>
             <a:spLocks noGrp="1"/>
           </p:cNvSpPr>
@@ -2978,7 +2978,7 @@
       </p:sp>
       <p:sp>
         <p:nvSpPr>
-          <p:cNvPr id="1080866776" name="Date Placeholder 4"/>
+          <p:cNvPr id="762133426" name="Date Placeholder 4"/>
           <p:cNvSpPr>
             <a:spLocks noGrp="1"/>
           </p:cNvSpPr>
@@ -3004,7 +3004,7 @@
       </p:sp>
       <p:sp>
         <p:nvSpPr>
-          <p:cNvPr id="1591843955" name="Footer Placeholder 5"/>
+          <p:cNvPr id="973269336" name="Footer Placeholder 5"/>
           <p:cNvSpPr>
             <a:spLocks noGrp="1"/>
           </p:cNvSpPr>
@@ -3026,7 +3026,7 @@
       </p:sp>
       <p:sp>
         <p:nvSpPr>
-          <p:cNvPr id="1490486843" name="Slide Number Placeholder 6"/>
+          <p:cNvPr id="2095838871" name="Slide Number Placeholder 6"/>
           <p:cNvSpPr>
             <a:spLocks noGrp="1"/>
           </p:cNvSpPr>
@@ -3077,7 +3077,7 @@
       </p:grpSpPr>
       <p:sp>
         <p:nvSpPr>
-          <p:cNvPr id="1036452567" name="Title 1"/>
+          <p:cNvPr id="1732070894" name="Title 1"/>
           <p:cNvSpPr>
             <a:spLocks noGrp="1"/>
           </p:cNvSpPr>
@@ -3107,7 +3107,7 @@
       </p:sp>
       <p:sp>
         <p:nvSpPr>
-          <p:cNvPr id="1850028687" name="Text Placeholder 2"/>
+          <p:cNvPr id="835534535" name="Text Placeholder 2"/>
           <p:cNvSpPr>
             <a:spLocks noGrp="1"/>
           </p:cNvSpPr>
@@ -3175,7 +3175,7 @@
       </p:sp>
       <p:sp>
         <p:nvSpPr>
-          <p:cNvPr id="2115649920" name="Content Placeholder 3"/>
+          <p:cNvPr id="1985342073" name="Content Placeholder 3"/>
           <p:cNvSpPr>
             <a:spLocks noGrp="1"/>
           </p:cNvSpPr>
@@ -3274,7 +3274,7 @@
       </p:sp>
       <p:sp>
         <p:nvSpPr>
-          <p:cNvPr id="113628129" name="Text Placeholder 4"/>
+          <p:cNvPr id="1724218273" name="Text Placeholder 4"/>
           <p:cNvSpPr>
             <a:spLocks noGrp="1"/>
           </p:cNvSpPr>
@@ -3342,7 +3342,7 @@
       </p:sp>
       <p:sp>
         <p:nvSpPr>
-          <p:cNvPr id="1634501940" name="Content Placeholder 5"/>
+          <p:cNvPr id="314662496" name="Content Placeholder 5"/>
           <p:cNvSpPr>
             <a:spLocks noGrp="1"/>
           </p:cNvSpPr>
@@ -3441,7 +3441,7 @@
       </p:sp>
       <p:sp>
         <p:nvSpPr>
-          <p:cNvPr id="789965808" name="Date Placeholder 6"/>
+          <p:cNvPr id="1680136130" name="Date Placeholder 6"/>
           <p:cNvSpPr>
             <a:spLocks noGrp="1"/>
           </p:cNvSpPr>
@@ -3467,7 +3467,7 @@
       </p:sp>
       <p:sp>
         <p:nvSpPr>
-          <p:cNvPr id="1539832180" name="Footer Placeholder 7"/>
+          <p:cNvPr id="90918444" name="Footer Placeholder 7"/>
           <p:cNvSpPr>
             <a:spLocks noGrp="1"/>
           </p:cNvSpPr>
@@ -3489,7 +3489,7 @@
       </p:sp>
       <p:sp>
         <p:nvSpPr>
-          <p:cNvPr id="1553343926" name="Slide Number Placeholder 8"/>
+          <p:cNvPr id="1693398078" name="Slide Number Placeholder 8"/>
           <p:cNvSpPr>
             <a:spLocks noGrp="1"/>
           </p:cNvSpPr>
@@ -3540,7 +3540,7 @@
       </p:grpSpPr>
       <p:sp>
         <p:nvSpPr>
-          <p:cNvPr id="719867485" name="Title 1"/>
+          <p:cNvPr id="530684133" name="Title 1"/>
           <p:cNvSpPr>
             <a:spLocks noGrp="1"/>
           </p:cNvSpPr>
@@ -3566,7 +3566,7 @@
       </p:sp>
       <p:sp>
         <p:nvSpPr>
-          <p:cNvPr id="282351563" name="Date Placeholder 2"/>
+          <p:cNvPr id="1826930044" name="Date Placeholder 2"/>
           <p:cNvSpPr>
             <a:spLocks noGrp="1"/>
           </p:cNvSpPr>
@@ -3592,7 +3592,7 @@
       </p:sp>
       <p:sp>
         <p:nvSpPr>
-          <p:cNvPr id="1784747675" name="Footer Placeholder 3"/>
+          <p:cNvPr id="1509020578" name="Footer Placeholder 3"/>
           <p:cNvSpPr>
             <a:spLocks noGrp="1"/>
           </p:cNvSpPr>
@@ -3614,7 +3614,7 @@
       </p:sp>
       <p:sp>
         <p:nvSpPr>
-          <p:cNvPr id="1438007579" name="Slide Number Placeholder 4"/>
+          <p:cNvPr id="1156279478" name="Slide Number Placeholder 4"/>
           <p:cNvSpPr>
             <a:spLocks noGrp="1"/>
           </p:cNvSpPr>
@@ -3665,7 +3665,7 @@
       </p:grpSpPr>
       <p:sp>
         <p:nvSpPr>
-          <p:cNvPr id="533467813" name="Date Placeholder 1"/>
+          <p:cNvPr id="1984172490" name="Date Placeholder 1"/>
           <p:cNvSpPr>
             <a:spLocks noGrp="1"/>
           </p:cNvSpPr>
@@ -3691,7 +3691,7 @@
       </p:sp>
       <p:sp>
         <p:nvSpPr>
-          <p:cNvPr id="1126242830" name="Footer Placeholder 2"/>
+          <p:cNvPr id="697000451" name="Footer Placeholder 2"/>
           <p:cNvSpPr>
             <a:spLocks noGrp="1"/>
           </p:cNvSpPr>
@@ -3713,7 +3713,7 @@
       </p:sp>
       <p:sp>
         <p:nvSpPr>
-          <p:cNvPr id="1641912548" name="Slide Number Placeholder 3"/>
+          <p:cNvPr id="1283952279" name="Slide Number Placeholder 3"/>
           <p:cNvSpPr>
             <a:spLocks noGrp="1"/>
           </p:cNvSpPr>
@@ -3764,7 +3764,7 @@
       </p:grpSpPr>
       <p:sp>
         <p:nvSpPr>
-          <p:cNvPr id="606184387" name="Title 1"/>
+          <p:cNvPr id="308347858" name="Title 1"/>
           <p:cNvSpPr>
             <a:spLocks noGrp="1"/>
           </p:cNvSpPr>
@@ -3799,7 +3799,7 @@
       </p:sp>
       <p:sp>
         <p:nvSpPr>
-          <p:cNvPr id="12939742" name="Content Placeholder 2"/>
+          <p:cNvPr id="1461374359" name="Content Placeholder 2"/>
           <p:cNvSpPr>
             <a:spLocks noGrp="1"/>
           </p:cNvSpPr>
@@ -3898,7 +3898,7 @@
       </p:sp>
       <p:sp>
         <p:nvSpPr>
-          <p:cNvPr id="2062475266" name="Text Placeholder 3"/>
+          <p:cNvPr id="505227304" name="Text Placeholder 3"/>
           <p:cNvSpPr>
             <a:spLocks noGrp="1"/>
           </p:cNvSpPr>
@@ -3966,7 +3966,7 @@
       </p:sp>
       <p:sp>
         <p:nvSpPr>
-          <p:cNvPr id="1719641023" name="Date Placeholder 4"/>
+          <p:cNvPr id="1002674165" name="Date Placeholder 4"/>
           <p:cNvSpPr>
             <a:spLocks noGrp="1"/>
           </p:cNvSpPr>
@@ -3992,7 +3992,7 @@
       </p:sp>
       <p:sp>
         <p:nvSpPr>
-          <p:cNvPr id="286859102" name="Footer Placeholder 5"/>
+          <p:cNvPr id="111371540" name="Footer Placeholder 5"/>
           <p:cNvSpPr>
             <a:spLocks noGrp="1"/>
           </p:cNvSpPr>
@@ -4014,7 +4014,7 @@
       </p:sp>
       <p:sp>
         <p:nvSpPr>
-          <p:cNvPr id="808387972" name="Slide Number Placeholder 6"/>
+          <p:cNvPr id="13038256" name="Slide Number Placeholder 6"/>
           <p:cNvSpPr>
             <a:spLocks noGrp="1"/>
           </p:cNvSpPr>
@@ -4065,7 +4065,7 @@
       </p:grpSpPr>
       <p:sp>
         <p:nvSpPr>
-          <p:cNvPr id="1535481226" name="Title 1"/>
+          <p:cNvPr id="1879680867" name="Title 1"/>
           <p:cNvSpPr>
             <a:spLocks noGrp="1"/>
           </p:cNvSpPr>
@@ -4100,7 +4100,7 @@
       </p:sp>
       <p:sp>
         <p:nvSpPr>
-          <p:cNvPr id="978607701" name="Picture Placeholder 2"/>
+          <p:cNvPr id="793411334" name="Picture Placeholder 2"/>
           <p:cNvSpPr>
             <a:spLocks noGrp="1"/>
           </p:cNvSpPr>
@@ -4164,7 +4164,7 @@
       </p:sp>
       <p:sp>
         <p:nvSpPr>
-          <p:cNvPr id="1969235468" name="Text Placeholder 3"/>
+          <p:cNvPr id="1692327751" name="Text Placeholder 3"/>
           <p:cNvSpPr>
             <a:spLocks noGrp="1"/>
           </p:cNvSpPr>
@@ -4232,7 +4232,7 @@
       </p:sp>
       <p:sp>
         <p:nvSpPr>
-          <p:cNvPr id="2067868597" name="Date Placeholder 4"/>
+          <p:cNvPr id="575935488" name="Date Placeholder 4"/>
           <p:cNvSpPr>
             <a:spLocks noGrp="1"/>
           </p:cNvSpPr>
@@ -4258,7 +4258,7 @@
       </p:sp>
       <p:sp>
         <p:nvSpPr>
-          <p:cNvPr id="129814206" name="Footer Placeholder 5"/>
+          <p:cNvPr id="1391933202" name="Footer Placeholder 5"/>
           <p:cNvSpPr>
             <a:spLocks noGrp="1"/>
           </p:cNvSpPr>
@@ -4280,7 +4280,7 @@
       </p:sp>
       <p:sp>
         <p:nvSpPr>
-          <p:cNvPr id="1481777667" name="Slide Number Placeholder 6"/>
+          <p:cNvPr id="434267041" name="Slide Number Placeholder 6"/>
           <p:cNvSpPr>
             <a:spLocks noGrp="1"/>
           </p:cNvSpPr>
@@ -4336,7 +4336,7 @@
       </p:grpSpPr>
       <p:sp>
         <p:nvSpPr>
-          <p:cNvPr id="1204460982" name="Shape 1059"/>
+          <p:cNvPr id="957248409" name="Shape 1059"/>
           <p:cNvSpPr>
             <a:spLocks noChangeArrowheads="1" noGrp="1"/>
           </p:cNvSpPr>
@@ -4414,7 +4414,7 @@
       </p:sp>
       <p:sp>
         <p:nvSpPr>
-          <p:cNvPr id="1777853965" name="Shape 1060"/>
+          <p:cNvPr id="574815629" name="Shape 1060"/>
           <p:cNvSpPr>
             <a:spLocks noChangeArrowheads="1" noGrp="1"/>
           </p:cNvSpPr>
@@ -4495,7 +4495,7 @@
       </p:sp>
       <p:sp>
         <p:nvSpPr>
-          <p:cNvPr id="1077272611" name="Shape 1061"/>
+          <p:cNvPr id="296895477" name="Shape 1061"/>
           <p:cNvSpPr>
             <a:spLocks noChangeArrowheads="1" noGrp="1"/>
           </p:cNvSpPr>
@@ -4613,7 +4613,7 @@
       </p:sp>
       <p:sp>
         <p:nvSpPr>
-          <p:cNvPr id="1711158617" name="Title 1"/>
+          <p:cNvPr id="973102475" name="Title 1"/>
           <p:cNvSpPr>
             <a:spLocks noGrp="1"/>
           </p:cNvSpPr>
@@ -4649,7 +4649,7 @@
       </p:sp>
       <p:sp>
         <p:nvSpPr>
-          <p:cNvPr id="78878338" name="Text Placeholder 2"/>
+          <p:cNvPr id="1224905521" name="Text Placeholder 2"/>
           <p:cNvSpPr>
             <a:spLocks noGrp="1"/>
           </p:cNvSpPr>
@@ -4725,7 +4725,7 @@
       </p:sp>
       <p:sp>
         <p:nvSpPr>
-          <p:cNvPr id="631219386" name="Date Placeholder 3"/>
+          <p:cNvPr id="1395512220" name="Date Placeholder 3"/>
           <p:cNvSpPr>
             <a:spLocks noGrp="1"/>
           </p:cNvSpPr>
@@ -4769,7 +4769,7 @@
       </p:sp>
       <p:sp>
         <p:nvSpPr>
-          <p:cNvPr id="594836196" name="Footer Placeholder 4"/>
+          <p:cNvPr id="387165738" name="Footer Placeholder 4"/>
           <p:cNvSpPr>
             <a:spLocks noGrp="1"/>
           </p:cNvSpPr>
@@ -4809,7 +4809,7 @@
       </p:sp>
       <p:sp>
         <p:nvSpPr>
-          <p:cNvPr id="834925694" name="Slide Number Placeholder 5"/>
+          <p:cNvPr id="142185680" name="Slide Number Placeholder 5"/>
           <p:cNvSpPr>
             <a:spLocks noGrp="1"/>
           </p:cNvSpPr>
@@ -5157,7 +5157,7 @@
       </p:grpSpPr>
       <p:sp>
         <p:nvSpPr>
-          <p:cNvPr id="1371980970" name="Title 1"/>
+          <p:cNvPr id="1830903448" name="Title 1"/>
           <p:cNvSpPr>
             <a:spLocks noGrp="1"/>
           </p:cNvSpPr>
@@ -5194,7 +5194,7 @@
       </p:sp>
       <p:sp>
         <p:nvSpPr>
-          <p:cNvPr id="1857255546" name=""/>
+          <p:cNvPr id="784156903" name=""/>
           <p:cNvSpPr txBox="1"/>
           <p:nvPr/>
         </p:nvSpPr>
@@ -5259,7 +5259,7 @@
       </p:grpSpPr>
       <p:sp>
         <p:nvSpPr>
-          <p:cNvPr id="2028549918" name="Title 1"/>
+          <p:cNvPr id="595566467" name="Title 1"/>
           <p:cNvSpPr>
             <a:spLocks noGrp="1"/>
           </p:cNvSpPr>
@@ -5285,7 +5285,7 @@
       </p:sp>
       <p:sp>
         <p:nvSpPr>
-          <p:cNvPr id="1760248315" name="Content Placeholder 2"/>
+          <p:cNvPr id="1432011619" name="Content Placeholder 2"/>
           <p:cNvSpPr>
             <a:spLocks noGrp="1"/>
           </p:cNvSpPr>
@@ -5631,7 +5631,7 @@
       </p:grpSpPr>
       <p:sp>
         <p:nvSpPr>
-          <p:cNvPr id="1182122045" name="Title 1"/>
+          <p:cNvPr id="486204928" name="Title 1"/>
           <p:cNvSpPr>
             <a:spLocks noGrp="1"/>
           </p:cNvSpPr>
@@ -5657,7 +5657,7 @@
       </p:sp>
       <p:sp>
         <p:nvSpPr>
-          <p:cNvPr id="654552801" name="Content Placeholder 2"/>
+          <p:cNvPr id="1080006023" name="Content Placeholder 2"/>
           <p:cNvSpPr>
             <a:spLocks noGrp="1"/>
           </p:cNvSpPr>
@@ -6055,7 +6055,7 @@
       </p:grpSpPr>
       <p:pic>
         <p:nvPicPr>
-          <p:cNvPr id="477174955" name=""/>
+          <p:cNvPr id="1768872505" name=""/>
           <p:cNvPicPr>
             <a:picLocks noChangeAspect="1"/>
           </p:cNvPicPr>
@@ -6078,7 +6078,7 @@
       </p:pic>
       <p:pic>
         <p:nvPicPr>
-          <p:cNvPr id="2143642338" name=""/>
+          <p:cNvPr id="342781456" name=""/>
           <p:cNvPicPr>
             <a:picLocks noChangeAspect="1"/>
           </p:cNvPicPr>
@@ -6100,7 +6100,7 @@
       </p:pic>
       <p:cxnSp>
         <p:nvCxnSpPr>
-          <p:cNvPr id="2131479040" name=""/>
+          <p:cNvPr id="158008989" name=""/>
           <p:cNvCxnSpPr/>
           <p:nvPr/>
         </p:nvCxnSpPr>
@@ -6138,7 +6138,7 @@
       </p:cxnSp>
       <p:sp>
         <p:nvSpPr>
-          <p:cNvPr id="51722391" name=""/>
+          <p:cNvPr id="1143996514" name=""/>
           <p:cNvSpPr txBox="1"/>
           <p:nvPr/>
         </p:nvSpPr>
@@ -6211,7 +6211,7 @@
       </p:grpSpPr>
       <p:pic>
         <p:nvPicPr>
-          <p:cNvPr id="1264313683" name=""/>
+          <p:cNvPr id="779806149" name=""/>
           <p:cNvPicPr>
             <a:picLocks noChangeAspect="1"/>
           </p:cNvPicPr>
@@ -6233,7 +6233,7 @@
       </p:pic>
       <p:pic>
         <p:nvPicPr>
-          <p:cNvPr id="331209014" name=""/>
+          <p:cNvPr id="603906235" name=""/>
           <p:cNvPicPr>
             <a:picLocks noChangeAspect="1"/>
           </p:cNvPicPr>
@@ -6288,7 +6288,7 @@
       </p:grpSpPr>
       <p:pic>
         <p:nvPicPr>
-          <p:cNvPr id="651888298" name=""/>
+          <p:cNvPr id="668604239" name=""/>
           <p:cNvPicPr>
             <a:picLocks noChangeAspect="1"/>
           </p:cNvPicPr>
@@ -6310,7 +6310,7 @@
       </p:pic>
       <p:pic>
         <p:nvPicPr>
-          <p:cNvPr id="915616986" name=""/>
+          <p:cNvPr id="1214223801" name=""/>
           <p:cNvPicPr>
             <a:picLocks noChangeAspect="1"/>
           </p:cNvPicPr>
@@ -6365,7 +6365,7 @@
       </p:grpSpPr>
       <p:pic>
         <p:nvPicPr>
-          <p:cNvPr id="1576110808" name=""/>
+          <p:cNvPr id="1540925010" name=""/>
           <p:cNvPicPr>
             <a:picLocks noChangeAspect="1"/>
           </p:cNvPicPr>
@@ -6420,7 +6420,7 @@
       </p:grpSpPr>
       <p:sp>
         <p:nvSpPr>
-          <p:cNvPr id="1999335196" name="Title 1"/>
+          <p:cNvPr id="1251154008" name="Title 1"/>
           <p:cNvSpPr>
             <a:spLocks noGrp="1"/>
           </p:cNvSpPr>
@@ -6450,7 +6450,7 @@
       </p:sp>
       <p:sp>
         <p:nvSpPr>
-          <p:cNvPr id="1766793986" name="Content Placeholder 2"/>
+          <p:cNvPr id="560573566" name="Content Placeholder 2"/>
           <p:cNvSpPr>
             <a:spLocks noGrp="1"/>
           </p:cNvSpPr>
@@ -6461,7 +6461,7 @@
         <p:spPr bwMode="auto"/>
         <p:txBody>
           <a:bodyPr vertOverflow="overflow" horzOverflow="overflow" vert="horz" wrap="square" lIns="91440" tIns="45720" rIns="91440" bIns="45720" numCol="1" spcCol="0" rtlCol="0" fromWordArt="0" anchor="t" anchorCtr="0" forceAA="0" upright="0" compatLnSpc="0">
-            <a:normAutofit/>
+            <a:normAutofit fontScale="90000" lnSpcReduction="2000"/>
           </a:bodyPr>
           <a:lstStyle/>
           <a:p>
@@ -6690,6 +6690,36 @@
                 <a:cs typeface="Arial"/>
               </a:rPr>
               <a:t>+1 untuk masing-masing komentar/tanya jawab (maks 5)</a:t>
+            </a:r>
+            <a:endParaRPr lang="en-US" sz="3200" b="0" i="0" u="none" strike="noStrike" cap="none" spc="0">
+              <a:solidFill>
+                <a:schemeClr val="tx1">
+                  <a:lumMod val="75000"/>
+                  <a:lumOff val="25000"/>
+                </a:schemeClr>
+              </a:solidFill>
+              <a:latin typeface="Arial"/>
+              <a:ea typeface="Arial"/>
+              <a:cs typeface="Arial"/>
+            </a:endParaRPr>
+          </a:p>
+          <a:p>
+            <a:pPr>
+              <a:defRPr/>
+            </a:pPr>
+            <a:r>
+              <a:rPr lang="en-US" sz="3200" b="0" i="0" u="none" strike="noStrike" cap="none" spc="0">
+                <a:solidFill>
+                  <a:schemeClr val="tx1">
+                    <a:lumMod val="75000"/>
+                    <a:lumOff val="25000"/>
+                  </a:schemeClr>
+                </a:solidFill>
+                <a:latin typeface="Arial"/>
+                <a:ea typeface="Arial"/>
+                <a:cs typeface="Arial"/>
+              </a:rPr>
+              <a:t>-1 untuk tidak memberikan penilaian</a:t>
             </a:r>
             <a:endParaRPr sz="3200" b="0" i="0" u="none" strike="noStrike" cap="none" spc="0">
               <a:solidFill>

--- a/rubrikETS.pptx
+++ b/rubrikETS.pptx
@@ -141,7 +141,7 @@
       </p:grpSpPr>
       <p:sp>
         <p:nvSpPr>
-          <p:cNvPr id="188538997" name="Header Placeholder 1"/>
+          <p:cNvPr id="737209666" name="Header Placeholder 1"/>
           <p:cNvSpPr>
             <a:spLocks noGrp="1"/>
           </p:cNvSpPr>
@@ -175,7 +175,7 @@
       </p:sp>
       <p:sp>
         <p:nvSpPr>
-          <p:cNvPr id="283794699" name="Date Placeholder 2"/>
+          <p:cNvPr id="1082158710" name="Date Placeholder 2"/>
           <p:cNvSpPr>
             <a:spLocks noGrp="1"/>
           </p:cNvSpPr>
@@ -213,7 +213,7 @@
       </p:sp>
       <p:sp>
         <p:nvSpPr>
-          <p:cNvPr id="1609653427" name="Slide Image Placeholder 3"/>
+          <p:cNvPr id="2032019994" name="Slide Image Placeholder 3"/>
           <p:cNvSpPr>
             <a:spLocks noChangeAspect="1" noGrp="1" noRot="1"/>
           </p:cNvSpPr>
@@ -249,7 +249,7 @@
       </p:sp>
       <p:sp>
         <p:nvSpPr>
-          <p:cNvPr id="1969107531" name="Notes Placeholder 4"/>
+          <p:cNvPr id="1867358599" name="Notes Placeholder 4"/>
           <p:cNvSpPr>
             <a:spLocks noGrp="1"/>
           </p:cNvSpPr>
@@ -323,7 +323,7 @@
       </p:sp>
       <p:sp>
         <p:nvSpPr>
-          <p:cNvPr id="1614509468" name="Footer Placeholder 5"/>
+          <p:cNvPr id="983784988" name="Footer Placeholder 5"/>
           <p:cNvSpPr>
             <a:spLocks noGrp="1"/>
           </p:cNvSpPr>
@@ -357,7 +357,7 @@
       </p:sp>
       <p:sp>
         <p:nvSpPr>
-          <p:cNvPr id="1458006703" name="Slide Number Placeholder 6"/>
+          <p:cNvPr id="284842799" name="Slide Number Placeholder 6"/>
           <p:cNvSpPr>
             <a:spLocks noGrp="1"/>
           </p:cNvSpPr>
@@ -510,7 +510,7 @@
       </p:grpSpPr>
       <p:sp>
         <p:nvSpPr>
-          <p:cNvPr id="1935007317" name="Slide Image Placeholder 1"/>
+          <p:cNvPr id="24904264" name="Slide Image Placeholder 1"/>
           <p:cNvSpPr>
             <a:spLocks noChangeAspect="1" noGrp="1" noRot="1"/>
           </p:cNvSpPr>
@@ -527,7 +527,7 @@
       </p:sp>
       <p:sp>
         <p:nvSpPr>
-          <p:cNvPr id="566465449" name="Notes Placeholder 2"/>
+          <p:cNvPr id="429847201" name="Notes Placeholder 2"/>
           <p:cNvSpPr>
             <a:spLocks noGrp="1"/>
           </p:cNvSpPr>
@@ -552,7 +552,7 @@
       </p:sp>
       <p:sp>
         <p:nvSpPr>
-          <p:cNvPr id="1934909019" name="Slide Number Placeholder 3"/>
+          <p:cNvPr id="995239750" name="Slide Number Placeholder 3"/>
           <p:cNvSpPr>
             <a:spLocks noGrp="1"/>
           </p:cNvSpPr>
@@ -603,7 +603,7 @@
       </p:grpSpPr>
       <p:sp>
         <p:nvSpPr>
-          <p:cNvPr id="55974911" name="Slide Image Placeholder 1"/>
+          <p:cNvPr id="18677265" name="Slide Image Placeholder 1"/>
           <p:cNvSpPr>
             <a:spLocks noChangeAspect="1" noGrp="1" noRot="1"/>
           </p:cNvSpPr>
@@ -615,7 +615,7 @@
       </p:sp>
       <p:sp>
         <p:nvSpPr>
-          <p:cNvPr id="171561693" name="Notes Placeholder 2"/>
+          <p:cNvPr id="718219671" name="Notes Placeholder 2"/>
           <p:cNvSpPr>
             <a:spLocks noGrp="1"/>
           </p:cNvSpPr>
@@ -637,7 +637,7 @@
       </p:sp>
       <p:sp>
         <p:nvSpPr>
-          <p:cNvPr id="389327349" name="Slide Number Placeholder 3"/>
+          <p:cNvPr id="530911346" name="Slide Number Placeholder 3"/>
           <p:cNvSpPr>
             <a:spLocks noGrp="1"/>
           </p:cNvSpPr>
@@ -688,7 +688,7 @@
       </p:grpSpPr>
       <p:sp>
         <p:nvSpPr>
-          <p:cNvPr id="1704940093" name="Slide Image Placeholder 1"/>
+          <p:cNvPr id="664622908" name="Slide Image Placeholder 1"/>
           <p:cNvSpPr>
             <a:spLocks noChangeAspect="1" noGrp="1" noRot="1"/>
           </p:cNvSpPr>
@@ -700,7 +700,7 @@
       </p:sp>
       <p:sp>
         <p:nvSpPr>
-          <p:cNvPr id="704869399" name="Notes Placeholder 2"/>
+          <p:cNvPr id="1072110366" name="Notes Placeholder 2"/>
           <p:cNvSpPr>
             <a:spLocks noGrp="1"/>
           </p:cNvSpPr>
@@ -722,7 +722,7 @@
       </p:sp>
       <p:sp>
         <p:nvSpPr>
-          <p:cNvPr id="1935178033" name="Slide Number Placeholder 3"/>
+          <p:cNvPr id="800389795" name="Slide Number Placeholder 3"/>
           <p:cNvSpPr>
             <a:spLocks noGrp="1"/>
           </p:cNvSpPr>
@@ -773,7 +773,7 @@
       </p:grpSpPr>
       <p:sp>
         <p:nvSpPr>
-          <p:cNvPr id="1361158008" name="Slide Image Placeholder 1"/>
+          <p:cNvPr id="531372189" name="Slide Image Placeholder 1"/>
           <p:cNvSpPr>
             <a:spLocks noChangeAspect="1" noGrp="1" noRot="1"/>
           </p:cNvSpPr>
@@ -785,7 +785,7 @@
       </p:sp>
       <p:sp>
         <p:nvSpPr>
-          <p:cNvPr id="2116281625" name="Notes Placeholder 2"/>
+          <p:cNvPr id="264089594" name="Notes Placeholder 2"/>
           <p:cNvSpPr>
             <a:spLocks noGrp="1"/>
           </p:cNvSpPr>
@@ -807,7 +807,7 @@
       </p:sp>
       <p:sp>
         <p:nvSpPr>
-          <p:cNvPr id="199155423" name="Slide Number Placeholder 3"/>
+          <p:cNvPr id="1579700042" name="Slide Number Placeholder 3"/>
           <p:cNvSpPr>
             <a:spLocks noGrp="1"/>
           </p:cNvSpPr>
@@ -858,7 +858,7 @@
       </p:grpSpPr>
       <p:sp>
         <p:nvSpPr>
-          <p:cNvPr id="1979804486" name="Slide Image Placeholder 1"/>
+          <p:cNvPr id="1210455417" name="Slide Image Placeholder 1"/>
           <p:cNvSpPr>
             <a:spLocks noChangeAspect="1" noGrp="1" noRot="1"/>
           </p:cNvSpPr>
@@ -870,7 +870,7 @@
       </p:sp>
       <p:sp>
         <p:nvSpPr>
-          <p:cNvPr id="468662442" name="Notes Placeholder 2"/>
+          <p:cNvPr id="1737430363" name="Notes Placeholder 2"/>
           <p:cNvSpPr>
             <a:spLocks noGrp="1"/>
           </p:cNvSpPr>
@@ -892,7 +892,7 @@
       </p:sp>
       <p:sp>
         <p:nvSpPr>
-          <p:cNvPr id="1339671381" name="Slide Number Placeholder 3"/>
+          <p:cNvPr id="546129885" name="Slide Number Placeholder 3"/>
           <p:cNvSpPr>
             <a:spLocks noGrp="1"/>
           </p:cNvSpPr>
@@ -943,7 +943,7 @@
       </p:grpSpPr>
       <p:sp>
         <p:nvSpPr>
-          <p:cNvPr id="1253397196" name="Slide Image Placeholder 1"/>
+          <p:cNvPr id="247820594" name="Slide Image Placeholder 1"/>
           <p:cNvSpPr>
             <a:spLocks noChangeAspect="1" noGrp="1" noRot="1"/>
           </p:cNvSpPr>
@@ -955,7 +955,7 @@
       </p:sp>
       <p:sp>
         <p:nvSpPr>
-          <p:cNvPr id="1803826488" name="Notes Placeholder 2"/>
+          <p:cNvPr id="548006910" name="Notes Placeholder 2"/>
           <p:cNvSpPr>
             <a:spLocks noGrp="1"/>
           </p:cNvSpPr>
@@ -977,7 +977,7 @@
       </p:sp>
       <p:sp>
         <p:nvSpPr>
-          <p:cNvPr id="859798717" name="Slide Number Placeholder 3"/>
+          <p:cNvPr id="1308927840" name="Slide Number Placeholder 3"/>
           <p:cNvSpPr>
             <a:spLocks noGrp="1"/>
           </p:cNvSpPr>
@@ -993,7 +993,7 @@
             <a:pPr>
               <a:defRPr/>
             </a:pPr>
-            <a:fld id="{E8E06924-543E-8C18-F9C4-B0301177035B}" type="slidenum">
+            <a:fld id="{AA7A4857-064C-C475-3664-DCE6F538448E}" type="slidenum">
               <a:rPr/>
               <a:t/>
             </a:fld>
@@ -1028,7 +1028,7 @@
       </p:grpSpPr>
       <p:sp>
         <p:nvSpPr>
-          <p:cNvPr id="1893444442" name="Slide Image Placeholder 1"/>
+          <p:cNvPr id="907344203" name="Slide Image Placeholder 1"/>
           <p:cNvSpPr>
             <a:spLocks noChangeAspect="1" noGrp="1" noRot="1"/>
           </p:cNvSpPr>
@@ -1040,7 +1040,7 @@
       </p:sp>
       <p:sp>
         <p:nvSpPr>
-          <p:cNvPr id="225789367" name="Notes Placeholder 2"/>
+          <p:cNvPr id="373784384" name="Notes Placeholder 2"/>
           <p:cNvSpPr>
             <a:spLocks noGrp="1"/>
           </p:cNvSpPr>
@@ -1062,7 +1062,7 @@
       </p:sp>
       <p:sp>
         <p:nvSpPr>
-          <p:cNvPr id="61852400" name="Slide Number Placeholder 3"/>
+          <p:cNvPr id="1345405086" name="Slide Number Placeholder 3"/>
           <p:cNvSpPr>
             <a:spLocks noGrp="1"/>
           </p:cNvSpPr>
@@ -1078,7 +1078,7 @@
             <a:pPr>
               <a:defRPr/>
             </a:pPr>
-            <a:fld id="{AA7A4857-064C-C475-3664-DCE6F538448E}" type="slidenum">
+            <a:fld id="{E8E06924-543E-8C18-F9C4-B0301177035B}" type="slidenum">
               <a:rPr/>
               <a:t/>
             </a:fld>
@@ -1113,7 +1113,7 @@
       </p:grpSpPr>
       <p:sp>
         <p:nvSpPr>
-          <p:cNvPr id="1827987300" name="Slide Image Placeholder 1"/>
+          <p:cNvPr id="1982792509" name="Slide Image Placeholder 1"/>
           <p:cNvSpPr>
             <a:spLocks noChangeAspect="1" noGrp="1" noRot="1"/>
           </p:cNvSpPr>
@@ -1125,7 +1125,7 @@
       </p:sp>
       <p:sp>
         <p:nvSpPr>
-          <p:cNvPr id="1706801608" name="Notes Placeholder 2"/>
+          <p:cNvPr id="1121526824" name="Notes Placeholder 2"/>
           <p:cNvSpPr>
             <a:spLocks noGrp="1"/>
           </p:cNvSpPr>
@@ -1147,7 +1147,7 @@
       </p:sp>
       <p:sp>
         <p:nvSpPr>
-          <p:cNvPr id="928355751" name="Slide Number Placeholder 3"/>
+          <p:cNvPr id="1102931092" name="Slide Number Placeholder 3"/>
           <p:cNvSpPr>
             <a:spLocks noGrp="1"/>
           </p:cNvSpPr>
@@ -1198,7 +1198,7 @@
       </p:grpSpPr>
       <p:sp>
         <p:nvSpPr>
-          <p:cNvPr id="417396993" name="Shape 1059"/>
+          <p:cNvPr id="2040212215" name="Shape 1059"/>
           <p:cNvSpPr>
             <a:spLocks noChangeArrowheads="1" noGrp="1"/>
           </p:cNvSpPr>
@@ -1321,7 +1321,7 @@
       </p:sp>
       <p:sp>
         <p:nvSpPr>
-          <p:cNvPr id="978389618" name="Shape 1060"/>
+          <p:cNvPr id="6918431" name="Shape 1060"/>
           <p:cNvSpPr>
             <a:spLocks noChangeArrowheads="1" noGrp="1"/>
           </p:cNvSpPr>
@@ -1412,7 +1412,7 @@
       </p:sp>
       <p:sp>
         <p:nvSpPr>
-          <p:cNvPr id="1426958506" name="Shape 1061"/>
+          <p:cNvPr id="717551506" name="Shape 1061"/>
           <p:cNvSpPr>
             <a:spLocks noChangeArrowheads="1" noGrp="1"/>
           </p:cNvSpPr>
@@ -1498,7 +1498,7 @@
       </p:sp>
       <p:sp>
         <p:nvSpPr>
-          <p:cNvPr id="1133383384" name="Shape 1062"/>
+          <p:cNvPr id="1417790937" name="Shape 1062"/>
           <p:cNvSpPr>
             <a:spLocks noChangeArrowheads="1" noGrp="1"/>
           </p:cNvSpPr>
@@ -1576,7 +1576,7 @@
       </p:sp>
       <p:sp>
         <p:nvSpPr>
-          <p:cNvPr id="1064800638" name="Shape 1063"/>
+          <p:cNvPr id="1407105282" name="Shape 1063"/>
           <p:cNvSpPr>
             <a:spLocks noChangeArrowheads="1" noGrp="1"/>
           </p:cNvSpPr>
@@ -1654,7 +1654,7 @@
       </p:sp>
       <p:sp>
         <p:nvSpPr>
-          <p:cNvPr id="61600099" name="Subtitle 2"/>
+          <p:cNvPr id="731505874" name="Subtitle 2"/>
           <p:cNvSpPr>
             <a:spLocks noGrp="1"/>
           </p:cNvSpPr>
@@ -1777,7 +1777,7 @@
       </p:sp>
       <p:sp>
         <p:nvSpPr>
-          <p:cNvPr id="1667652134" name="Date Placeholder 3"/>
+          <p:cNvPr id="1697030186" name="Date Placeholder 3"/>
           <p:cNvSpPr>
             <a:spLocks noGrp="1"/>
           </p:cNvSpPr>
@@ -1803,7 +1803,7 @@
       </p:sp>
       <p:sp>
         <p:nvSpPr>
-          <p:cNvPr id="798566830" name="Footer Placeholder 4"/>
+          <p:cNvPr id="1339405470" name="Footer Placeholder 4"/>
           <p:cNvSpPr>
             <a:spLocks noGrp="1"/>
           </p:cNvSpPr>
@@ -1825,7 +1825,7 @@
       </p:sp>
       <p:sp>
         <p:nvSpPr>
-          <p:cNvPr id="311572081" name="Slide Number Placeholder 5"/>
+          <p:cNvPr id="1382612159" name="Slide Number Placeholder 5"/>
           <p:cNvSpPr>
             <a:spLocks noGrp="1"/>
           </p:cNvSpPr>
@@ -1851,7 +1851,7 @@
       </p:sp>
       <p:sp>
         <p:nvSpPr>
-          <p:cNvPr id="711966018" name="Title 6"/>
+          <p:cNvPr id="708269789" name="Title 6"/>
           <p:cNvSpPr>
             <a:spLocks noGrp="1"/>
           </p:cNvSpPr>
@@ -1911,7 +1911,7 @@
       </p:grpSpPr>
       <p:sp>
         <p:nvSpPr>
-          <p:cNvPr id="298514161" name="Title 1"/>
+          <p:cNvPr id="465596155" name="Title 1"/>
           <p:cNvSpPr>
             <a:spLocks noGrp="1"/>
           </p:cNvSpPr>
@@ -1937,7 +1937,7 @@
       </p:sp>
       <p:sp>
         <p:nvSpPr>
-          <p:cNvPr id="1232676987" name="Vertical Text Placeholder 2"/>
+          <p:cNvPr id="672468141" name="Vertical Text Placeholder 2"/>
           <p:cNvSpPr>
             <a:spLocks noGrp="1"/>
           </p:cNvSpPr>
@@ -2003,7 +2003,7 @@
       </p:sp>
       <p:sp>
         <p:nvSpPr>
-          <p:cNvPr id="1843067494" name="Date Placeholder 3"/>
+          <p:cNvPr id="215655947" name="Date Placeholder 3"/>
           <p:cNvSpPr>
             <a:spLocks noGrp="1"/>
           </p:cNvSpPr>
@@ -2029,7 +2029,7 @@
       </p:sp>
       <p:sp>
         <p:nvSpPr>
-          <p:cNvPr id="1784807401" name="Footer Placeholder 4"/>
+          <p:cNvPr id="1545170717" name="Footer Placeholder 4"/>
           <p:cNvSpPr>
             <a:spLocks noGrp="1"/>
           </p:cNvSpPr>
@@ -2051,7 +2051,7 @@
       </p:sp>
       <p:sp>
         <p:nvSpPr>
-          <p:cNvPr id="2003243039" name="Slide Number Placeholder 5"/>
+          <p:cNvPr id="1000991704" name="Slide Number Placeholder 5"/>
           <p:cNvSpPr>
             <a:spLocks noGrp="1"/>
           </p:cNvSpPr>
@@ -2102,7 +2102,7 @@
       </p:grpSpPr>
       <p:sp>
         <p:nvSpPr>
-          <p:cNvPr id="893844139" name="Vertical Title 1"/>
+          <p:cNvPr id="709597325" name="Vertical Title 1"/>
           <p:cNvSpPr>
             <a:spLocks noGrp="1"/>
           </p:cNvSpPr>
@@ -2137,7 +2137,7 @@
       </p:sp>
       <p:sp>
         <p:nvSpPr>
-          <p:cNvPr id="1077319282" name="Vertical Text Placeholder 2"/>
+          <p:cNvPr id="1868870623" name="Vertical Text Placeholder 2"/>
           <p:cNvSpPr>
             <a:spLocks noGrp="1"/>
           </p:cNvSpPr>
@@ -2208,7 +2208,7 @@
       </p:sp>
       <p:sp>
         <p:nvSpPr>
-          <p:cNvPr id="414112602" name="Date Placeholder 3"/>
+          <p:cNvPr id="1695800205" name="Date Placeholder 3"/>
           <p:cNvSpPr>
             <a:spLocks noGrp="1"/>
           </p:cNvSpPr>
@@ -2234,7 +2234,7 @@
       </p:sp>
       <p:sp>
         <p:nvSpPr>
-          <p:cNvPr id="88229974" name="Footer Placeholder 4"/>
+          <p:cNvPr id="1994779748" name="Footer Placeholder 4"/>
           <p:cNvSpPr>
             <a:spLocks noGrp="1"/>
           </p:cNvSpPr>
@@ -2256,7 +2256,7 @@
       </p:sp>
       <p:sp>
         <p:nvSpPr>
-          <p:cNvPr id="1857243497" name="Slide Number Placeholder 5"/>
+          <p:cNvPr id="314121312" name="Slide Number Placeholder 5"/>
           <p:cNvSpPr>
             <a:spLocks noGrp="1"/>
           </p:cNvSpPr>
@@ -2307,7 +2307,7 @@
       </p:grpSpPr>
       <p:sp>
         <p:nvSpPr>
-          <p:cNvPr id="1549875813" name="Title 1"/>
+          <p:cNvPr id="1858483619" name="Title 1"/>
           <p:cNvSpPr>
             <a:spLocks noGrp="1"/>
           </p:cNvSpPr>
@@ -2333,7 +2333,7 @@
       </p:sp>
       <p:sp>
         <p:nvSpPr>
-          <p:cNvPr id="2085994951" name="Content Placeholder 2"/>
+          <p:cNvPr id="692113971" name="Content Placeholder 2"/>
           <p:cNvSpPr>
             <a:spLocks noGrp="1"/>
           </p:cNvSpPr>
@@ -2399,7 +2399,7 @@
       </p:sp>
       <p:sp>
         <p:nvSpPr>
-          <p:cNvPr id="382801725" name="Date Placeholder 3"/>
+          <p:cNvPr id="1083582151" name="Date Placeholder 3"/>
           <p:cNvSpPr>
             <a:spLocks noGrp="1"/>
           </p:cNvSpPr>
@@ -2425,7 +2425,7 @@
       </p:sp>
       <p:sp>
         <p:nvSpPr>
-          <p:cNvPr id="246179888" name="Footer Placeholder 4"/>
+          <p:cNvPr id="1597647295" name="Footer Placeholder 4"/>
           <p:cNvSpPr>
             <a:spLocks noGrp="1"/>
           </p:cNvSpPr>
@@ -2447,7 +2447,7 @@
       </p:sp>
       <p:sp>
         <p:nvSpPr>
-          <p:cNvPr id="543656543" name="Slide Number Placeholder 5"/>
+          <p:cNvPr id="1953258620" name="Slide Number Placeholder 5"/>
           <p:cNvSpPr>
             <a:spLocks noGrp="1"/>
           </p:cNvSpPr>
@@ -2498,7 +2498,7 @@
       </p:grpSpPr>
       <p:sp>
         <p:nvSpPr>
-          <p:cNvPr id="242090428" name="Title 1"/>
+          <p:cNvPr id="1999820571" name="Title 1"/>
           <p:cNvSpPr>
             <a:spLocks noGrp="1"/>
           </p:cNvSpPr>
@@ -2533,7 +2533,7 @@
       </p:sp>
       <p:sp>
         <p:nvSpPr>
-          <p:cNvPr id="68192721" name="Text Placeholder 2"/>
+          <p:cNvPr id="1263838035" name="Text Placeholder 2"/>
           <p:cNvSpPr>
             <a:spLocks noGrp="1"/>
           </p:cNvSpPr>
@@ -2655,7 +2655,7 @@
       </p:sp>
       <p:sp>
         <p:nvSpPr>
-          <p:cNvPr id="260701519" name="Date Placeholder 3"/>
+          <p:cNvPr id="117350328" name="Date Placeholder 3"/>
           <p:cNvSpPr>
             <a:spLocks noGrp="1"/>
           </p:cNvSpPr>
@@ -2681,7 +2681,7 @@
       </p:sp>
       <p:sp>
         <p:nvSpPr>
-          <p:cNvPr id="1003634035" name="Footer Placeholder 4"/>
+          <p:cNvPr id="293664962" name="Footer Placeholder 4"/>
           <p:cNvSpPr>
             <a:spLocks noGrp="1"/>
           </p:cNvSpPr>
@@ -2703,7 +2703,7 @@
       </p:sp>
       <p:sp>
         <p:nvSpPr>
-          <p:cNvPr id="1602247440" name="Slide Number Placeholder 5"/>
+          <p:cNvPr id="2118330391" name="Slide Number Placeholder 5"/>
           <p:cNvSpPr>
             <a:spLocks noGrp="1"/>
           </p:cNvSpPr>
@@ -2754,7 +2754,7 @@
       </p:grpSpPr>
       <p:sp>
         <p:nvSpPr>
-          <p:cNvPr id="475545105" name="Title 1"/>
+          <p:cNvPr id="619811002" name="Title 1"/>
           <p:cNvSpPr>
             <a:spLocks noGrp="1"/>
           </p:cNvSpPr>
@@ -2780,7 +2780,7 @@
       </p:sp>
       <p:sp>
         <p:nvSpPr>
-          <p:cNvPr id="1953193207" name="Content Placeholder 2"/>
+          <p:cNvPr id="1431077271" name="Content Placeholder 2"/>
           <p:cNvSpPr>
             <a:spLocks noGrp="1"/>
           </p:cNvSpPr>
@@ -2879,7 +2879,7 @@
       </p:sp>
       <p:sp>
         <p:nvSpPr>
-          <p:cNvPr id="1996526997" name="Content Placeholder 3"/>
+          <p:cNvPr id="79731091" name="Content Placeholder 3"/>
           <p:cNvSpPr>
             <a:spLocks noGrp="1"/>
           </p:cNvSpPr>
@@ -2978,7 +2978,7 @@
       </p:sp>
       <p:sp>
         <p:nvSpPr>
-          <p:cNvPr id="762133426" name="Date Placeholder 4"/>
+          <p:cNvPr id="576212573" name="Date Placeholder 4"/>
           <p:cNvSpPr>
             <a:spLocks noGrp="1"/>
           </p:cNvSpPr>
@@ -3004,7 +3004,7 @@
       </p:sp>
       <p:sp>
         <p:nvSpPr>
-          <p:cNvPr id="973269336" name="Footer Placeholder 5"/>
+          <p:cNvPr id="327400766" name="Footer Placeholder 5"/>
           <p:cNvSpPr>
             <a:spLocks noGrp="1"/>
           </p:cNvSpPr>
@@ -3026,7 +3026,7 @@
       </p:sp>
       <p:sp>
         <p:nvSpPr>
-          <p:cNvPr id="2095838871" name="Slide Number Placeholder 6"/>
+          <p:cNvPr id="624217868" name="Slide Number Placeholder 6"/>
           <p:cNvSpPr>
             <a:spLocks noGrp="1"/>
           </p:cNvSpPr>
@@ -3077,7 +3077,7 @@
       </p:grpSpPr>
       <p:sp>
         <p:nvSpPr>
-          <p:cNvPr id="1732070894" name="Title 1"/>
+          <p:cNvPr id="1509976990" name="Title 1"/>
           <p:cNvSpPr>
             <a:spLocks noGrp="1"/>
           </p:cNvSpPr>
@@ -3107,7 +3107,7 @@
       </p:sp>
       <p:sp>
         <p:nvSpPr>
-          <p:cNvPr id="835534535" name="Text Placeholder 2"/>
+          <p:cNvPr id="1788418754" name="Text Placeholder 2"/>
           <p:cNvSpPr>
             <a:spLocks noGrp="1"/>
           </p:cNvSpPr>
@@ -3175,7 +3175,7 @@
       </p:sp>
       <p:sp>
         <p:nvSpPr>
-          <p:cNvPr id="1985342073" name="Content Placeholder 3"/>
+          <p:cNvPr id="617541200" name="Content Placeholder 3"/>
           <p:cNvSpPr>
             <a:spLocks noGrp="1"/>
           </p:cNvSpPr>
@@ -3274,7 +3274,7 @@
       </p:sp>
       <p:sp>
         <p:nvSpPr>
-          <p:cNvPr id="1724218273" name="Text Placeholder 4"/>
+          <p:cNvPr id="603384471" name="Text Placeholder 4"/>
           <p:cNvSpPr>
             <a:spLocks noGrp="1"/>
           </p:cNvSpPr>
@@ -3342,7 +3342,7 @@
       </p:sp>
       <p:sp>
         <p:nvSpPr>
-          <p:cNvPr id="314662496" name="Content Placeholder 5"/>
+          <p:cNvPr id="875436321" name="Content Placeholder 5"/>
           <p:cNvSpPr>
             <a:spLocks noGrp="1"/>
           </p:cNvSpPr>
@@ -3441,7 +3441,7 @@
       </p:sp>
       <p:sp>
         <p:nvSpPr>
-          <p:cNvPr id="1680136130" name="Date Placeholder 6"/>
+          <p:cNvPr id="871295087" name="Date Placeholder 6"/>
           <p:cNvSpPr>
             <a:spLocks noGrp="1"/>
           </p:cNvSpPr>
@@ -3467,7 +3467,7 @@
       </p:sp>
       <p:sp>
         <p:nvSpPr>
-          <p:cNvPr id="90918444" name="Footer Placeholder 7"/>
+          <p:cNvPr id="941839930" name="Footer Placeholder 7"/>
           <p:cNvSpPr>
             <a:spLocks noGrp="1"/>
           </p:cNvSpPr>
@@ -3489,7 +3489,7 @@
       </p:sp>
       <p:sp>
         <p:nvSpPr>
-          <p:cNvPr id="1693398078" name="Slide Number Placeholder 8"/>
+          <p:cNvPr id="1317728885" name="Slide Number Placeholder 8"/>
           <p:cNvSpPr>
             <a:spLocks noGrp="1"/>
           </p:cNvSpPr>
@@ -3540,7 +3540,7 @@
       </p:grpSpPr>
       <p:sp>
         <p:nvSpPr>
-          <p:cNvPr id="530684133" name="Title 1"/>
+          <p:cNvPr id="1860757854" name="Title 1"/>
           <p:cNvSpPr>
             <a:spLocks noGrp="1"/>
           </p:cNvSpPr>
@@ -3566,7 +3566,7 @@
       </p:sp>
       <p:sp>
         <p:nvSpPr>
-          <p:cNvPr id="1826930044" name="Date Placeholder 2"/>
+          <p:cNvPr id="76622725" name="Date Placeholder 2"/>
           <p:cNvSpPr>
             <a:spLocks noGrp="1"/>
           </p:cNvSpPr>
@@ -3592,7 +3592,7 @@
       </p:sp>
       <p:sp>
         <p:nvSpPr>
-          <p:cNvPr id="1509020578" name="Footer Placeholder 3"/>
+          <p:cNvPr id="533077054" name="Footer Placeholder 3"/>
           <p:cNvSpPr>
             <a:spLocks noGrp="1"/>
           </p:cNvSpPr>
@@ -3614,7 +3614,7 @@
       </p:sp>
       <p:sp>
         <p:nvSpPr>
-          <p:cNvPr id="1156279478" name="Slide Number Placeholder 4"/>
+          <p:cNvPr id="1756553006" name="Slide Number Placeholder 4"/>
           <p:cNvSpPr>
             <a:spLocks noGrp="1"/>
           </p:cNvSpPr>
@@ -3665,7 +3665,7 @@
       </p:grpSpPr>
       <p:sp>
         <p:nvSpPr>
-          <p:cNvPr id="1984172490" name="Date Placeholder 1"/>
+          <p:cNvPr id="1361915590" name="Date Placeholder 1"/>
           <p:cNvSpPr>
             <a:spLocks noGrp="1"/>
           </p:cNvSpPr>
@@ -3691,7 +3691,7 @@
       </p:sp>
       <p:sp>
         <p:nvSpPr>
-          <p:cNvPr id="697000451" name="Footer Placeholder 2"/>
+          <p:cNvPr id="1971404499" name="Footer Placeholder 2"/>
           <p:cNvSpPr>
             <a:spLocks noGrp="1"/>
           </p:cNvSpPr>
@@ -3713,7 +3713,7 @@
       </p:sp>
       <p:sp>
         <p:nvSpPr>
-          <p:cNvPr id="1283952279" name="Slide Number Placeholder 3"/>
+          <p:cNvPr id="1008963519" name="Slide Number Placeholder 3"/>
           <p:cNvSpPr>
             <a:spLocks noGrp="1"/>
           </p:cNvSpPr>
@@ -3764,7 +3764,7 @@
       </p:grpSpPr>
       <p:sp>
         <p:nvSpPr>
-          <p:cNvPr id="308347858" name="Title 1"/>
+          <p:cNvPr id="884268747" name="Title 1"/>
           <p:cNvSpPr>
             <a:spLocks noGrp="1"/>
           </p:cNvSpPr>
@@ -3799,7 +3799,7 @@
       </p:sp>
       <p:sp>
         <p:nvSpPr>
-          <p:cNvPr id="1461374359" name="Content Placeholder 2"/>
+          <p:cNvPr id="398555066" name="Content Placeholder 2"/>
           <p:cNvSpPr>
             <a:spLocks noGrp="1"/>
           </p:cNvSpPr>
@@ -3898,7 +3898,7 @@
       </p:sp>
       <p:sp>
         <p:nvSpPr>
-          <p:cNvPr id="505227304" name="Text Placeholder 3"/>
+          <p:cNvPr id="185121796" name="Text Placeholder 3"/>
           <p:cNvSpPr>
             <a:spLocks noGrp="1"/>
           </p:cNvSpPr>
@@ -3966,7 +3966,7 @@
       </p:sp>
       <p:sp>
         <p:nvSpPr>
-          <p:cNvPr id="1002674165" name="Date Placeholder 4"/>
+          <p:cNvPr id="2037794873" name="Date Placeholder 4"/>
           <p:cNvSpPr>
             <a:spLocks noGrp="1"/>
           </p:cNvSpPr>
@@ -3992,7 +3992,7 @@
       </p:sp>
       <p:sp>
         <p:nvSpPr>
-          <p:cNvPr id="111371540" name="Footer Placeholder 5"/>
+          <p:cNvPr id="996258835" name="Footer Placeholder 5"/>
           <p:cNvSpPr>
             <a:spLocks noGrp="1"/>
           </p:cNvSpPr>
@@ -4014,7 +4014,7 @@
       </p:sp>
       <p:sp>
         <p:nvSpPr>
-          <p:cNvPr id="13038256" name="Slide Number Placeholder 6"/>
+          <p:cNvPr id="1171708684" name="Slide Number Placeholder 6"/>
           <p:cNvSpPr>
             <a:spLocks noGrp="1"/>
           </p:cNvSpPr>
@@ -4065,7 +4065,7 @@
       </p:grpSpPr>
       <p:sp>
         <p:nvSpPr>
-          <p:cNvPr id="1879680867" name="Title 1"/>
+          <p:cNvPr id="911235499" name="Title 1"/>
           <p:cNvSpPr>
             <a:spLocks noGrp="1"/>
           </p:cNvSpPr>
@@ -4100,7 +4100,7 @@
       </p:sp>
       <p:sp>
         <p:nvSpPr>
-          <p:cNvPr id="793411334" name="Picture Placeholder 2"/>
+          <p:cNvPr id="1149263360" name="Picture Placeholder 2"/>
           <p:cNvSpPr>
             <a:spLocks noGrp="1"/>
           </p:cNvSpPr>
@@ -4164,7 +4164,7 @@
       </p:sp>
       <p:sp>
         <p:nvSpPr>
-          <p:cNvPr id="1692327751" name="Text Placeholder 3"/>
+          <p:cNvPr id="876413489" name="Text Placeholder 3"/>
           <p:cNvSpPr>
             <a:spLocks noGrp="1"/>
           </p:cNvSpPr>
@@ -4232,7 +4232,7 @@
       </p:sp>
       <p:sp>
         <p:nvSpPr>
-          <p:cNvPr id="575935488" name="Date Placeholder 4"/>
+          <p:cNvPr id="1115961945" name="Date Placeholder 4"/>
           <p:cNvSpPr>
             <a:spLocks noGrp="1"/>
           </p:cNvSpPr>
@@ -4258,7 +4258,7 @@
       </p:sp>
       <p:sp>
         <p:nvSpPr>
-          <p:cNvPr id="1391933202" name="Footer Placeholder 5"/>
+          <p:cNvPr id="1085901059" name="Footer Placeholder 5"/>
           <p:cNvSpPr>
             <a:spLocks noGrp="1"/>
           </p:cNvSpPr>
@@ -4280,7 +4280,7 @@
       </p:sp>
       <p:sp>
         <p:nvSpPr>
-          <p:cNvPr id="434267041" name="Slide Number Placeholder 6"/>
+          <p:cNvPr id="738737795" name="Slide Number Placeholder 6"/>
           <p:cNvSpPr>
             <a:spLocks noGrp="1"/>
           </p:cNvSpPr>
@@ -4336,7 +4336,7 @@
       </p:grpSpPr>
       <p:sp>
         <p:nvSpPr>
-          <p:cNvPr id="957248409" name="Shape 1059"/>
+          <p:cNvPr id="254600922" name="Shape 1059"/>
           <p:cNvSpPr>
             <a:spLocks noChangeArrowheads="1" noGrp="1"/>
           </p:cNvSpPr>
@@ -4414,7 +4414,7 @@
       </p:sp>
       <p:sp>
         <p:nvSpPr>
-          <p:cNvPr id="574815629" name="Shape 1060"/>
+          <p:cNvPr id="758023154" name="Shape 1060"/>
           <p:cNvSpPr>
             <a:spLocks noChangeArrowheads="1" noGrp="1"/>
           </p:cNvSpPr>
@@ -4495,7 +4495,7 @@
       </p:sp>
       <p:sp>
         <p:nvSpPr>
-          <p:cNvPr id="296895477" name="Shape 1061"/>
+          <p:cNvPr id="1429428512" name="Shape 1061"/>
           <p:cNvSpPr>
             <a:spLocks noChangeArrowheads="1" noGrp="1"/>
           </p:cNvSpPr>
@@ -4613,7 +4613,7 @@
       </p:sp>
       <p:sp>
         <p:nvSpPr>
-          <p:cNvPr id="973102475" name="Title 1"/>
+          <p:cNvPr id="1865735462" name="Title 1"/>
           <p:cNvSpPr>
             <a:spLocks noGrp="1"/>
           </p:cNvSpPr>
@@ -4649,7 +4649,7 @@
       </p:sp>
       <p:sp>
         <p:nvSpPr>
-          <p:cNvPr id="1224905521" name="Text Placeholder 2"/>
+          <p:cNvPr id="2124307542" name="Text Placeholder 2"/>
           <p:cNvSpPr>
             <a:spLocks noGrp="1"/>
           </p:cNvSpPr>
@@ -4725,7 +4725,7 @@
       </p:sp>
       <p:sp>
         <p:nvSpPr>
-          <p:cNvPr id="1395512220" name="Date Placeholder 3"/>
+          <p:cNvPr id="785339199" name="Date Placeholder 3"/>
           <p:cNvSpPr>
             <a:spLocks noGrp="1"/>
           </p:cNvSpPr>
@@ -4769,7 +4769,7 @@
       </p:sp>
       <p:sp>
         <p:nvSpPr>
-          <p:cNvPr id="387165738" name="Footer Placeholder 4"/>
+          <p:cNvPr id="1967049962" name="Footer Placeholder 4"/>
           <p:cNvSpPr>
             <a:spLocks noGrp="1"/>
           </p:cNvSpPr>
@@ -4809,7 +4809,7 @@
       </p:sp>
       <p:sp>
         <p:nvSpPr>
-          <p:cNvPr id="142185680" name="Slide Number Placeholder 5"/>
+          <p:cNvPr id="1200912148" name="Slide Number Placeholder 5"/>
           <p:cNvSpPr>
             <a:spLocks noGrp="1"/>
           </p:cNvSpPr>
@@ -5157,7 +5157,7 @@
       </p:grpSpPr>
       <p:sp>
         <p:nvSpPr>
-          <p:cNvPr id="1830903448" name="Title 1"/>
+          <p:cNvPr id="693215837" name="Title 1"/>
           <p:cNvSpPr>
             <a:spLocks noGrp="1"/>
           </p:cNvSpPr>
@@ -5186,7 +5186,7 @@
             </a:r>
             <a:r>
               <a:rPr lang="en-US" sz="4800" b="1"/>
-              <a:t>Evaluasi Tengah Semester (1, 8, 15 April)</a:t>
+              <a:t>Evaluasi Tengah Semester (3, 10, 17 April)</a:t>
             </a:r>
             <a:endParaRPr sz="4800"/>
           </a:p>
@@ -5194,7 +5194,7 @@
       </p:sp>
       <p:sp>
         <p:nvSpPr>
-          <p:cNvPr id="784156903" name=""/>
+          <p:cNvPr id="2009635502" name=""/>
           <p:cNvSpPr txBox="1"/>
           <p:nvPr/>
         </p:nvSpPr>
@@ -5259,7 +5259,7 @@
       </p:grpSpPr>
       <p:sp>
         <p:nvSpPr>
-          <p:cNvPr id="595566467" name="Title 1"/>
+          <p:cNvPr id="1493548862" name="Title 1"/>
           <p:cNvSpPr>
             <a:spLocks noGrp="1"/>
           </p:cNvSpPr>
@@ -5285,7 +5285,7 @@
       </p:sp>
       <p:sp>
         <p:nvSpPr>
-          <p:cNvPr id="1432011619" name="Content Placeholder 2"/>
+          <p:cNvPr id="208757478" name="Content Placeholder 2"/>
           <p:cNvSpPr>
             <a:spLocks noGrp="1"/>
           </p:cNvSpPr>
@@ -5362,7 +5362,7 @@
                 <a:ea typeface="Arial"/>
                 <a:cs typeface="Arial"/>
               </a:rPr>
-              <a:t>-an dat, lah)</a:t>
+              <a:t>-an data, lah)</a:t>
             </a:r>
             <a:endParaRPr lang="en-US" sz="3200" b="0" i="0" u="none" strike="noStrike" cap="none" spc="0">
               <a:solidFill>
@@ -5631,7 +5631,7 @@
       </p:grpSpPr>
       <p:sp>
         <p:nvSpPr>
-          <p:cNvPr id="486204928" name="Title 1"/>
+          <p:cNvPr id="1334375959" name="Title 1"/>
           <p:cNvSpPr>
             <a:spLocks noGrp="1"/>
           </p:cNvSpPr>
@@ -5657,7 +5657,7 @@
       </p:sp>
       <p:sp>
         <p:nvSpPr>
-          <p:cNvPr id="1080006023" name="Content Placeholder 2"/>
+          <p:cNvPr id="1637727182" name="Content Placeholder 2"/>
           <p:cNvSpPr>
             <a:spLocks noGrp="1"/>
           </p:cNvSpPr>
@@ -5667,7 +5667,7 @@
         </p:nvSpPr>
         <p:spPr bwMode="auto">
           <a:xfrm flipH="0" flipV="0">
-            <a:off x="609598" y="1600200"/>
+            <a:off x="609598" y="1318474"/>
             <a:ext cx="11565300" cy="5181598"/>
           </a:xfrm>
         </p:spPr>
@@ -5737,6 +5737,36 @@
                 <a:cs typeface="Arial"/>
               </a:rPr>
               <a:t>slide:</a:t>
+            </a:r>
+            <a:endParaRPr lang="en-US" sz="3200" b="1" i="0" u="none" strike="noStrike" cap="none" spc="0">
+              <a:solidFill>
+                <a:schemeClr val="tx1">
+                  <a:lumMod val="75000"/>
+                  <a:lumOff val="25000"/>
+                </a:schemeClr>
+              </a:solidFill>
+              <a:latin typeface="Arial"/>
+              <a:ea typeface="Arial"/>
+              <a:cs typeface="Arial"/>
+            </a:endParaRPr>
+          </a:p>
+          <a:p>
+            <a:pPr>
+              <a:defRPr/>
+            </a:pPr>
+            <a:r>
+              <a:rPr lang="en-US" sz="3200" b="0" i="0" u="none" strike="noStrike" cap="none" spc="0">
+                <a:solidFill>
+                  <a:schemeClr val="tx1">
+                    <a:lumMod val="75000"/>
+                    <a:lumOff val="25000"/>
+                  </a:schemeClr>
+                </a:solidFill>
+                <a:latin typeface="Arial"/>
+                <a:ea typeface="Arial"/>
+                <a:cs typeface="Arial"/>
+              </a:rPr>
+              <a:t>Judul, anggota</a:t>
             </a:r>
             <a:endParaRPr lang="en-US" sz="3200" b="0" i="0" u="none" strike="noStrike" cap="none" spc="0">
               <a:solidFill>
@@ -6055,7 +6085,7 @@
       </p:grpSpPr>
       <p:pic>
         <p:nvPicPr>
-          <p:cNvPr id="1768872505" name=""/>
+          <p:cNvPr id="1043782563" name=""/>
           <p:cNvPicPr>
             <a:picLocks noChangeAspect="1"/>
           </p:cNvPicPr>
@@ -6078,7 +6108,7 @@
       </p:pic>
       <p:pic>
         <p:nvPicPr>
-          <p:cNvPr id="342781456" name=""/>
+          <p:cNvPr id="1947523505" name=""/>
           <p:cNvPicPr>
             <a:picLocks noChangeAspect="1"/>
           </p:cNvPicPr>
@@ -6100,7 +6130,7 @@
       </p:pic>
       <p:cxnSp>
         <p:nvCxnSpPr>
-          <p:cNvPr id="158008989" name=""/>
+          <p:cNvPr id="1430324863" name=""/>
           <p:cNvCxnSpPr/>
           <p:nvPr/>
         </p:nvCxnSpPr>
@@ -6138,7 +6168,7 @@
       </p:cxnSp>
       <p:sp>
         <p:nvSpPr>
-          <p:cNvPr id="1143996514" name=""/>
+          <p:cNvPr id="1553435603" name=""/>
           <p:cNvSpPr txBox="1"/>
           <p:nvPr/>
         </p:nvSpPr>
@@ -6211,7 +6241,7 @@
       </p:grpSpPr>
       <p:pic>
         <p:nvPicPr>
-          <p:cNvPr id="779806149" name=""/>
+          <p:cNvPr id="909314309" name=""/>
           <p:cNvPicPr>
             <a:picLocks noChangeAspect="1"/>
           </p:cNvPicPr>
@@ -6233,7 +6263,7 @@
       </p:pic>
       <p:pic>
         <p:nvPicPr>
-          <p:cNvPr id="603906235" name=""/>
+          <p:cNvPr id="1098187889" name=""/>
           <p:cNvPicPr>
             <a:picLocks noChangeAspect="1"/>
           </p:cNvPicPr>
@@ -6288,7 +6318,7 @@
       </p:grpSpPr>
       <p:pic>
         <p:nvPicPr>
-          <p:cNvPr id="668604239" name=""/>
+          <p:cNvPr id="1615767845" name=""/>
           <p:cNvPicPr>
             <a:picLocks noChangeAspect="1"/>
           </p:cNvPicPr>
@@ -6299,31 +6329,9 @@
           <a:stretch/>
         </p:blipFill>
         <p:spPr bwMode="auto">
-          <a:xfrm>
-            <a:off x="209549" y="247649"/>
-            <a:ext cx="9486899" cy="4772025"/>
-          </a:xfrm>
-          <a:prstGeom prst="rect">
-            <a:avLst/>
-          </a:prstGeom>
-        </p:spPr>
-      </p:pic>
-      <p:pic>
-        <p:nvPicPr>
-          <p:cNvPr id="1214223801" name=""/>
-          <p:cNvPicPr>
-            <a:picLocks noChangeAspect="1"/>
-          </p:cNvPicPr>
-          <p:nvPr/>
-        </p:nvPicPr>
-        <p:blipFill>
-          <a:blip r:embed="rId4"/>
-          <a:stretch/>
-        </p:blipFill>
-        <p:spPr bwMode="auto">
           <a:xfrm flipH="0" flipV="0">
-            <a:off x="6000750" y="3429000"/>
-            <a:ext cx="5793149" cy="3004817"/>
+            <a:off x="-266699" y="-114299"/>
+            <a:ext cx="12141085" cy="6743700"/>
           </a:xfrm>
           <a:prstGeom prst="rect">
             <a:avLst/>
@@ -6365,7 +6373,7 @@
       </p:grpSpPr>
       <p:pic>
         <p:nvPicPr>
-          <p:cNvPr id="1540925010" name=""/>
+          <p:cNvPr id="1913926260" name=""/>
           <p:cNvPicPr>
             <a:picLocks noChangeAspect="1"/>
           </p:cNvPicPr>
@@ -6376,9 +6384,31 @@
           <a:stretch/>
         </p:blipFill>
         <p:spPr bwMode="auto">
+          <a:xfrm>
+            <a:off x="209549" y="247649"/>
+            <a:ext cx="9486899" cy="4772025"/>
+          </a:xfrm>
+          <a:prstGeom prst="rect">
+            <a:avLst/>
+          </a:prstGeom>
+        </p:spPr>
+      </p:pic>
+      <p:pic>
+        <p:nvPicPr>
+          <p:cNvPr id="1444580677" name=""/>
+          <p:cNvPicPr>
+            <a:picLocks noChangeAspect="1"/>
+          </p:cNvPicPr>
+          <p:nvPr/>
+        </p:nvPicPr>
+        <p:blipFill>
+          <a:blip r:embed="rId4"/>
+          <a:stretch/>
+        </p:blipFill>
+        <p:spPr bwMode="auto">
           <a:xfrm flipH="0" flipV="0">
-            <a:off x="-266699" y="-114299"/>
-            <a:ext cx="12141085" cy="6743700"/>
+            <a:off x="6000750" y="3429000"/>
+            <a:ext cx="5793149" cy="3004817"/>
           </a:xfrm>
           <a:prstGeom prst="rect">
             <a:avLst/>
@@ -6420,7 +6450,7 @@
       </p:grpSpPr>
       <p:sp>
         <p:nvSpPr>
-          <p:cNvPr id="1251154008" name="Title 1"/>
+          <p:cNvPr id="1858262420" name="Title 1"/>
           <p:cNvSpPr>
             <a:spLocks noGrp="1"/>
           </p:cNvSpPr>
@@ -6450,7 +6480,7 @@
       </p:sp>
       <p:sp>
         <p:nvSpPr>
-          <p:cNvPr id="560573566" name="Content Placeholder 2"/>
+          <p:cNvPr id="1371850512" name="Content Placeholder 2"/>
           <p:cNvSpPr>
             <a:spLocks noGrp="1"/>
           </p:cNvSpPr>
@@ -6461,7 +6491,7 @@
         <p:spPr bwMode="auto"/>
         <p:txBody>
           <a:bodyPr vertOverflow="overflow" horzOverflow="overflow" vert="horz" wrap="square" lIns="91440" tIns="45720" rIns="91440" bIns="45720" numCol="1" spcCol="0" rtlCol="0" fromWordArt="0" anchor="t" anchorCtr="0" forceAA="0" upright="0" compatLnSpc="0">
-            <a:normAutofit fontScale="90000" lnSpcReduction="2000"/>
+            <a:normAutofit fontScale="85000" lnSpcReduction="3000"/>
           </a:bodyPr>
           <a:lstStyle/>
           <a:p>
@@ -6480,7 +6510,7 @@
                 <a:ea typeface="Arial"/>
                 <a:cs typeface="Arial"/>
               </a:rPr>
-              <a:t>Kejujuran dan keapaadaan (baca keagaksedikittegaan)</a:t>
+              <a:t>Kejujuran dan objektivitas/keapaadaan (baca keagaksedikittegaan)</a:t>
             </a:r>
             <a:endParaRPr lang="en-US" sz="3200" b="0" i="0" u="none" strike="noStrike" cap="none" spc="0">
               <a:solidFill>
